--- a/Money-Wise PPT.pptx
+++ b/Money-Wise PPT.pptx
@@ -4372,1140 +4372,2053 @@
           <a:chExt cx="0" cy="0"/>
         </a:xfrm>
       </p:grpSpPr>
-      <p:sp>
-        <p:nvSpPr>
-          <p:cNvPr id="3" name="Shape 0"/>
-          <p:cNvSpPr/>
-          <p:nvPr/>
-        </p:nvSpPr>
-        <p:spPr>
-          <a:xfrm>
-            <a:off x="478153" y="2895974"/>
-            <a:ext cx="691107" cy="0"/>
-          </a:xfrm>
-          <a:prstGeom prst="line">
-            <a:avLst/>
-          </a:prstGeom>
-          <a:solidFill>
-            <a:srgbClr val="F8FCF4"/>
-          </a:solidFill>
-          <a:ln w="10583">
-            <a:solidFill>
-              <a:srgbClr val="6F8A5E"/>
-            </a:solidFill>
-            <a:prstDash val="solid"/>
-            <a:headEnd type="none"/>
-            <a:tailEnd type="none"/>
-          </a:ln>
-        </p:spPr>
-      </p:sp>
-      <p:sp>
-        <p:nvSpPr>
-          <p:cNvPr id="4" name="Shape 1"/>
-          <p:cNvSpPr/>
-          <p:nvPr/>
-        </p:nvSpPr>
-        <p:spPr>
-          <a:xfrm>
-            <a:off x="1160583" y="2895974"/>
-            <a:ext cx="691107" cy="0"/>
-          </a:xfrm>
-          <a:prstGeom prst="line">
-            <a:avLst/>
-          </a:prstGeom>
-          <a:solidFill>
-            <a:srgbClr val="F8FCF4"/>
-          </a:solidFill>
-          <a:ln w="10583">
-            <a:solidFill>
-              <a:srgbClr val="6F8A5E"/>
-            </a:solidFill>
-            <a:prstDash val="solid"/>
-            <a:headEnd type="none"/>
-            <a:tailEnd type="none"/>
-          </a:ln>
-        </p:spPr>
-      </p:sp>
-      <p:sp>
-        <p:nvSpPr>
-          <p:cNvPr id="5" name="Shape 2"/>
-          <p:cNvSpPr/>
-          <p:nvPr/>
-        </p:nvSpPr>
-        <p:spPr>
-          <a:xfrm>
-            <a:off x="1843014" y="2895974"/>
-            <a:ext cx="691107" cy="0"/>
-          </a:xfrm>
-          <a:prstGeom prst="line">
-            <a:avLst/>
-          </a:prstGeom>
-          <a:solidFill>
-            <a:srgbClr val="F8FCF4"/>
-          </a:solidFill>
-          <a:ln w="10583">
-            <a:solidFill>
-              <a:srgbClr val="6F8A5E"/>
-            </a:solidFill>
-            <a:prstDash val="solid"/>
-            <a:headEnd type="none"/>
-            <a:tailEnd type="none"/>
-          </a:ln>
-        </p:spPr>
-      </p:sp>
-      <p:sp>
-        <p:nvSpPr>
-          <p:cNvPr id="6" name="Shape 3"/>
-          <p:cNvSpPr/>
-          <p:nvPr/>
-        </p:nvSpPr>
-        <p:spPr>
-          <a:xfrm>
-            <a:off x="2525444" y="2895974"/>
-            <a:ext cx="691107" cy="0"/>
-          </a:xfrm>
-          <a:prstGeom prst="line">
-            <a:avLst/>
-          </a:prstGeom>
-          <a:solidFill>
-            <a:srgbClr val="F8FCF4"/>
-          </a:solidFill>
-          <a:ln w="10583">
-            <a:solidFill>
-              <a:srgbClr val="6F8A5E"/>
-            </a:solidFill>
-            <a:prstDash val="solid"/>
-            <a:headEnd type="none"/>
-            <a:tailEnd type="none"/>
-          </a:ln>
-        </p:spPr>
-      </p:sp>
-      <p:sp>
-        <p:nvSpPr>
-          <p:cNvPr id="7" name="Shape 4"/>
-          <p:cNvSpPr/>
-          <p:nvPr/>
-        </p:nvSpPr>
-        <p:spPr>
-          <a:xfrm>
-            <a:off x="3207875" y="2895974"/>
-            <a:ext cx="691107" cy="0"/>
-          </a:xfrm>
-          <a:prstGeom prst="line">
-            <a:avLst/>
-          </a:prstGeom>
-          <a:solidFill>
-            <a:srgbClr val="F8FCF4"/>
-          </a:solidFill>
-          <a:ln w="10583">
-            <a:solidFill>
-              <a:srgbClr val="6F8A5E"/>
-            </a:solidFill>
-            <a:prstDash val="solid"/>
-            <a:headEnd type="none"/>
-            <a:tailEnd type="none"/>
-          </a:ln>
-        </p:spPr>
-      </p:sp>
-      <p:sp>
-        <p:nvSpPr>
-          <p:cNvPr id="8" name="Shape 5"/>
-          <p:cNvSpPr/>
-          <p:nvPr/>
-        </p:nvSpPr>
-        <p:spPr>
-          <a:xfrm>
-            <a:off x="3890305" y="2895974"/>
-            <a:ext cx="691107" cy="0"/>
-          </a:xfrm>
-          <a:prstGeom prst="line">
-            <a:avLst/>
-          </a:prstGeom>
-          <a:solidFill>
-            <a:srgbClr val="F8FCF4"/>
-          </a:solidFill>
-          <a:ln w="10583">
-            <a:solidFill>
-              <a:srgbClr val="6F8A5E"/>
-            </a:solidFill>
-            <a:prstDash val="solid"/>
-            <a:headEnd type="none"/>
-            <a:tailEnd type="none"/>
-          </a:ln>
-        </p:spPr>
-      </p:sp>
-      <p:sp>
-        <p:nvSpPr>
-          <p:cNvPr id="9" name="Shape 6"/>
-          <p:cNvSpPr/>
-          <p:nvPr/>
-        </p:nvSpPr>
-        <p:spPr>
-          <a:xfrm>
-            <a:off x="4572735" y="2895974"/>
-            <a:ext cx="691107" cy="0"/>
-          </a:xfrm>
-          <a:prstGeom prst="line">
-            <a:avLst/>
-          </a:prstGeom>
-          <a:solidFill>
-            <a:srgbClr val="F8FCF4"/>
-          </a:solidFill>
-          <a:ln w="10583">
-            <a:solidFill>
-              <a:srgbClr val="6F8A5E"/>
-            </a:solidFill>
-            <a:prstDash val="solid"/>
-            <a:headEnd type="none"/>
-            <a:tailEnd type="none"/>
-          </a:ln>
-        </p:spPr>
-      </p:sp>
-      <p:sp>
-        <p:nvSpPr>
-          <p:cNvPr id="10" name="Shape 7"/>
-          <p:cNvSpPr/>
-          <p:nvPr/>
-        </p:nvSpPr>
-        <p:spPr>
-          <a:xfrm>
-            <a:off x="5255166" y="2895974"/>
-            <a:ext cx="691107" cy="0"/>
-          </a:xfrm>
-          <a:prstGeom prst="line">
-            <a:avLst/>
-          </a:prstGeom>
-          <a:solidFill>
-            <a:srgbClr val="F8FCF4"/>
-          </a:solidFill>
-          <a:ln w="10583">
-            <a:solidFill>
-              <a:srgbClr val="6F8A5E"/>
-            </a:solidFill>
-            <a:prstDash val="solid"/>
-            <a:headEnd type="none"/>
-            <a:tailEnd type="none"/>
-          </a:ln>
-        </p:spPr>
-      </p:sp>
-      <p:sp>
-        <p:nvSpPr>
-          <p:cNvPr id="11" name="Shape 8"/>
-          <p:cNvSpPr/>
-          <p:nvPr/>
-        </p:nvSpPr>
-        <p:spPr>
-          <a:xfrm>
-            <a:off x="5937596" y="2895974"/>
-            <a:ext cx="691107" cy="0"/>
-          </a:xfrm>
-          <a:prstGeom prst="line">
-            <a:avLst/>
-          </a:prstGeom>
-          <a:solidFill>
-            <a:srgbClr val="F8FCF4"/>
-          </a:solidFill>
-          <a:ln w="10583">
-            <a:solidFill>
-              <a:srgbClr val="6F8A5E"/>
-            </a:solidFill>
-            <a:prstDash val="solid"/>
-            <a:headEnd type="none"/>
-            <a:tailEnd type="none"/>
-          </a:ln>
-        </p:spPr>
-      </p:sp>
-      <p:sp>
-        <p:nvSpPr>
-          <p:cNvPr id="12" name="Shape 9"/>
-          <p:cNvSpPr/>
-          <p:nvPr/>
-        </p:nvSpPr>
-        <p:spPr>
-          <a:xfrm>
-            <a:off x="6620026" y="2895974"/>
-            <a:ext cx="691107" cy="0"/>
-          </a:xfrm>
-          <a:prstGeom prst="line">
-            <a:avLst/>
-          </a:prstGeom>
-          <a:solidFill>
-            <a:srgbClr val="F8FCF4"/>
-          </a:solidFill>
-          <a:ln w="10583">
-            <a:solidFill>
-              <a:srgbClr val="6F8A5E"/>
-            </a:solidFill>
-            <a:prstDash val="solid"/>
-            <a:headEnd type="none"/>
-            <a:tailEnd type="none"/>
-          </a:ln>
-        </p:spPr>
-      </p:sp>
-      <p:sp>
-        <p:nvSpPr>
-          <p:cNvPr id="13" name="Shape 10"/>
-          <p:cNvSpPr/>
-          <p:nvPr/>
-        </p:nvSpPr>
-        <p:spPr>
-          <a:xfrm>
-            <a:off x="7302457" y="2895974"/>
-            <a:ext cx="691107" cy="0"/>
-          </a:xfrm>
-          <a:prstGeom prst="line">
-            <a:avLst/>
-          </a:prstGeom>
-          <a:solidFill>
-            <a:srgbClr val="F8FCF4"/>
-          </a:solidFill>
-          <a:ln w="10583">
-            <a:solidFill>
-              <a:srgbClr val="6F8A5E"/>
-            </a:solidFill>
-            <a:prstDash val="solid"/>
-            <a:headEnd type="none"/>
-            <a:tailEnd type="none"/>
-          </a:ln>
-        </p:spPr>
-      </p:sp>
-      <p:sp>
-        <p:nvSpPr>
-          <p:cNvPr id="14" name="Shape 11"/>
-          <p:cNvSpPr/>
-          <p:nvPr/>
-        </p:nvSpPr>
-        <p:spPr>
-          <a:xfrm>
-            <a:off x="7984887" y="2895974"/>
-            <a:ext cx="691107" cy="0"/>
-          </a:xfrm>
-          <a:prstGeom prst="line">
-            <a:avLst/>
-          </a:prstGeom>
-          <a:solidFill>
-            <a:srgbClr val="F8FCF4"/>
-          </a:solidFill>
-          <a:ln w="10583">
-            <a:solidFill>
-              <a:srgbClr val="6F8A5E"/>
-            </a:solidFill>
-            <a:prstDash val="solid"/>
-            <a:headEnd type="none"/>
-            <a:tailEnd type="arrow"/>
-          </a:ln>
-        </p:spPr>
-      </p:sp>
-      <p:sp>
-        <p:nvSpPr>
-          <p:cNvPr id="15" name="Text 12"/>
-          <p:cNvSpPr/>
-          <p:nvPr/>
-        </p:nvSpPr>
-        <p:spPr>
-          <a:xfrm>
-            <a:off x="977177" y="3252669"/>
-            <a:ext cx="1249710" cy="426641"/>
+      <p:graphicFrame>
+        <p:nvGraphicFramePr>
+          <p:cNvPr id="39" name="Table 38">
+            <a:extLst>
+              <a:ext uri="{FF2B5EF4-FFF2-40B4-BE49-F238E27FC236}">
+                <a16:creationId xmlns:a16="http://schemas.microsoft.com/office/drawing/2014/main" id="{D14668E9-DA9E-F8E2-0549-71C192251026}"/>
+              </a:ext>
+            </a:extLst>
+          </p:cNvPr>
+          <p:cNvGraphicFramePr>
+            <a:graphicFrameLocks noGrp="1"/>
+          </p:cNvGraphicFramePr>
+          <p:nvPr>
+            <p:extLst>
+              <p:ext uri="{D42A27DB-BD31-4B8C-83A1-F6EECF244321}">
+                <p14:modId xmlns:p14="http://schemas.microsoft.com/office/powerpoint/2010/main" val="3561665513"/>
+              </p:ext>
+            </p:extLst>
+          </p:nvPr>
+        </p:nvGraphicFramePr>
+        <p:xfrm>
+          <a:off x="1074260" y="473186"/>
+          <a:ext cx="7065819" cy="4541564"/>
+        </p:xfrm>
+        <a:graphic>
+          <a:graphicData uri="http://schemas.openxmlformats.org/drawingml/2006/table">
+            <a:tbl>
+              <a:tblPr firstRow="1" firstCol="1" bandRow="1">
+                <a:tableStyleId>{638B1855-1B75-4FBE-930C-398BA8C253C6}</a:tableStyleId>
+              </a:tblPr>
+              <a:tblGrid>
+                <a:gridCol w="1552545">
+                  <a:extLst>
+                    <a:ext uri="{9D8B030D-6E8A-4147-A177-3AD203B41FA5}">
+                      <a16:colId xmlns:a16="http://schemas.microsoft.com/office/drawing/2014/main" val="2221667865"/>
+                    </a:ext>
+                  </a:extLst>
+                </a:gridCol>
+                <a:gridCol w="1848206">
+                  <a:extLst>
+                    <a:ext uri="{9D8B030D-6E8A-4147-A177-3AD203B41FA5}">
+                      <a16:colId xmlns:a16="http://schemas.microsoft.com/office/drawing/2014/main" val="1976432844"/>
+                    </a:ext>
+                  </a:extLst>
+                </a:gridCol>
+                <a:gridCol w="3665068">
+                  <a:extLst>
+                    <a:ext uri="{9D8B030D-6E8A-4147-A177-3AD203B41FA5}">
+                      <a16:colId xmlns:a16="http://schemas.microsoft.com/office/drawing/2014/main" val="1318862262"/>
+                    </a:ext>
+                  </a:extLst>
+                </a:gridCol>
+              </a:tblGrid>
+              <a:tr h="187879">
+                <a:tc>
+                  <a:txBody>
+                    <a:bodyPr/>
+                    <a:lstStyle/>
+                    <a:p>
+                      <a:pPr>
+                        <a:lnSpc>
+                          <a:spcPct val="115000"/>
+                        </a:lnSpc>
+                        <a:spcAft>
+                          <a:spcPts val="800"/>
+                        </a:spcAft>
+                      </a:pPr>
+                      <a:r>
+                        <a:rPr lang="en-KE" sz="900" kern="100" dirty="0">
+                          <a:effectLst/>
+                          <a:latin typeface="Century gothic" panose="020B0502020202020204" pitchFamily="34" charset="0"/>
+                        </a:rPr>
+                        <a:t>Week</a:t>
+                      </a:r>
+                      <a:endParaRPr lang="en-KE" sz="900" kern="100" dirty="0">
+                        <a:effectLst/>
+                        <a:latin typeface="Century gothic" panose="020B0502020202020204" pitchFamily="34" charset="0"/>
+                        <a:ea typeface="Calibri" panose="020F0502020204030204" pitchFamily="34" charset="0"/>
+                        <a:cs typeface="Times New Roman" panose="02020603050405020304" pitchFamily="18" charset="0"/>
+                      </a:endParaRPr>
+                    </a:p>
+                  </a:txBody>
+                  <a:tcPr marL="6839" marR="6839" marT="6839" marB="6839" anchor="ctr">
+                    <a:lnL w="12700" cap="flat" cmpd="sng" algn="ctr">
+                      <a:solidFill>
+                        <a:schemeClr val="tx1"/>
+                      </a:solidFill>
+                      <a:prstDash val="solid"/>
+                      <a:round/>
+                      <a:headEnd type="none" w="med" len="med"/>
+                      <a:tailEnd type="none" w="med" len="med"/>
+                    </a:lnL>
+                    <a:lnR w="12700" cap="flat" cmpd="sng" algn="ctr">
+                      <a:solidFill>
+                        <a:schemeClr val="tx1"/>
+                      </a:solidFill>
+                      <a:prstDash val="solid"/>
+                      <a:round/>
+                      <a:headEnd type="none" w="med" len="med"/>
+                      <a:tailEnd type="none" w="med" len="med"/>
+                    </a:lnR>
+                    <a:lnT w="12700" cap="flat" cmpd="sng" algn="ctr">
+                      <a:solidFill>
+                        <a:schemeClr val="tx1"/>
+                      </a:solidFill>
+                      <a:prstDash val="solid"/>
+                      <a:round/>
+                      <a:headEnd type="none" w="med" len="med"/>
+                      <a:tailEnd type="none" w="med" len="med"/>
+                    </a:lnT>
+                    <a:lnB w="12700" cap="flat" cmpd="sng" algn="ctr">
+                      <a:solidFill>
+                        <a:schemeClr val="tx1"/>
+                      </a:solidFill>
+                      <a:prstDash val="solid"/>
+                      <a:round/>
+                      <a:headEnd type="none" w="med" len="med"/>
+                      <a:tailEnd type="none" w="med" len="med"/>
+                    </a:lnB>
+                    <a:solidFill>
+                      <a:srgbClr val="405037"/>
+                    </a:solidFill>
+                  </a:tcPr>
+                </a:tc>
+                <a:tc>
+                  <a:txBody>
+                    <a:bodyPr/>
+                    <a:lstStyle/>
+                    <a:p>
+                      <a:pPr>
+                        <a:lnSpc>
+                          <a:spcPct val="115000"/>
+                        </a:lnSpc>
+                        <a:spcAft>
+                          <a:spcPts val="800"/>
+                        </a:spcAft>
+                      </a:pPr>
+                      <a:r>
+                        <a:rPr lang="en-KE" sz="900" kern="100" dirty="0">
+                          <a:effectLst/>
+                          <a:latin typeface="Century gothic" panose="020B0502020202020204" pitchFamily="34" charset="0"/>
+                        </a:rPr>
+                        <a:t>Phase</a:t>
+                      </a:r>
+                      <a:endParaRPr lang="en-KE" sz="900" kern="100" dirty="0">
+                        <a:effectLst/>
+                        <a:latin typeface="Century gothic" panose="020B0502020202020204" pitchFamily="34" charset="0"/>
+                        <a:ea typeface="Calibri" panose="020F0502020204030204" pitchFamily="34" charset="0"/>
+                        <a:cs typeface="Times New Roman" panose="02020603050405020304" pitchFamily="18" charset="0"/>
+                      </a:endParaRPr>
+                    </a:p>
+                  </a:txBody>
+                  <a:tcPr marL="6839" marR="6839" marT="6839" marB="6839" anchor="ctr">
+                    <a:lnL w="12700" cap="flat" cmpd="sng" algn="ctr">
+                      <a:solidFill>
+                        <a:schemeClr val="tx1"/>
+                      </a:solidFill>
+                      <a:prstDash val="solid"/>
+                      <a:round/>
+                      <a:headEnd type="none" w="med" len="med"/>
+                      <a:tailEnd type="none" w="med" len="med"/>
+                    </a:lnL>
+                    <a:lnR w="12700" cap="flat" cmpd="sng" algn="ctr">
+                      <a:solidFill>
+                        <a:schemeClr val="tx1"/>
+                      </a:solidFill>
+                      <a:prstDash val="solid"/>
+                      <a:round/>
+                      <a:headEnd type="none" w="med" len="med"/>
+                      <a:tailEnd type="none" w="med" len="med"/>
+                    </a:lnR>
+                    <a:lnT w="12700" cap="flat" cmpd="sng" algn="ctr">
+                      <a:solidFill>
+                        <a:schemeClr val="tx1"/>
+                      </a:solidFill>
+                      <a:prstDash val="solid"/>
+                      <a:round/>
+                      <a:headEnd type="none" w="med" len="med"/>
+                      <a:tailEnd type="none" w="med" len="med"/>
+                    </a:lnT>
+                    <a:lnB w="12700" cap="flat" cmpd="sng" algn="ctr">
+                      <a:solidFill>
+                        <a:schemeClr val="tx1"/>
+                      </a:solidFill>
+                      <a:prstDash val="solid"/>
+                      <a:round/>
+                      <a:headEnd type="none" w="med" len="med"/>
+                      <a:tailEnd type="none" w="med" len="med"/>
+                    </a:lnB>
+                    <a:solidFill>
+                      <a:srgbClr val="405037"/>
+                    </a:solidFill>
+                  </a:tcPr>
+                </a:tc>
+                <a:tc>
+                  <a:txBody>
+                    <a:bodyPr/>
+                    <a:lstStyle/>
+                    <a:p>
+                      <a:pPr>
+                        <a:lnSpc>
+                          <a:spcPct val="115000"/>
+                        </a:lnSpc>
+                        <a:spcAft>
+                          <a:spcPts val="800"/>
+                        </a:spcAft>
+                      </a:pPr>
+                      <a:r>
+                        <a:rPr lang="en-KE" sz="900" kern="100" dirty="0">
+                          <a:effectLst/>
+                          <a:latin typeface="Century gothic" panose="020B0502020202020204" pitchFamily="34" charset="0"/>
+                        </a:rPr>
+                        <a:t>Tasks</a:t>
+                      </a:r>
+                      <a:endParaRPr lang="en-KE" sz="900" kern="100" dirty="0">
+                        <a:effectLst/>
+                        <a:latin typeface="Century gothic" panose="020B0502020202020204" pitchFamily="34" charset="0"/>
+                        <a:ea typeface="Calibri" panose="020F0502020204030204" pitchFamily="34" charset="0"/>
+                        <a:cs typeface="Times New Roman" panose="02020603050405020304" pitchFamily="18" charset="0"/>
+                      </a:endParaRPr>
+                    </a:p>
+                  </a:txBody>
+                  <a:tcPr marL="6839" marR="6839" marT="6839" marB="6839" anchor="ctr">
+                    <a:lnL w="12700" cap="flat" cmpd="sng" algn="ctr">
+                      <a:solidFill>
+                        <a:schemeClr val="tx1"/>
+                      </a:solidFill>
+                      <a:prstDash val="solid"/>
+                      <a:round/>
+                      <a:headEnd type="none" w="med" len="med"/>
+                      <a:tailEnd type="none" w="med" len="med"/>
+                    </a:lnL>
+                    <a:lnR w="12700" cap="flat" cmpd="sng" algn="ctr">
+                      <a:solidFill>
+                        <a:schemeClr val="tx1"/>
+                      </a:solidFill>
+                      <a:prstDash val="solid"/>
+                      <a:round/>
+                      <a:headEnd type="none" w="med" len="med"/>
+                      <a:tailEnd type="none" w="med" len="med"/>
+                    </a:lnR>
+                    <a:lnT w="12700" cap="flat" cmpd="sng" algn="ctr">
+                      <a:solidFill>
+                        <a:schemeClr val="tx1"/>
+                      </a:solidFill>
+                      <a:prstDash val="solid"/>
+                      <a:round/>
+                      <a:headEnd type="none" w="med" len="med"/>
+                      <a:tailEnd type="none" w="med" len="med"/>
+                    </a:lnT>
+                    <a:lnB w="12700" cap="flat" cmpd="sng" algn="ctr">
+                      <a:solidFill>
+                        <a:schemeClr val="tx1"/>
+                      </a:solidFill>
+                      <a:prstDash val="solid"/>
+                      <a:round/>
+                      <a:headEnd type="none" w="med" len="med"/>
+                      <a:tailEnd type="none" w="med" len="med"/>
+                    </a:lnB>
+                    <a:solidFill>
+                      <a:srgbClr val="405037"/>
+                    </a:solidFill>
+                  </a:tcPr>
+                </a:tc>
+                <a:extLst>
+                  <a:ext uri="{0D108BD9-81ED-4DB2-BD59-A6C34878D82A}">
+                    <a16:rowId xmlns:a16="http://schemas.microsoft.com/office/drawing/2014/main" val="3792810345"/>
+                  </a:ext>
+                </a:extLst>
+              </a:tr>
+              <a:tr h="488377">
+                <a:tc>
+                  <a:txBody>
+                    <a:bodyPr/>
+                    <a:lstStyle/>
+                    <a:p>
+                      <a:pPr>
+                        <a:lnSpc>
+                          <a:spcPct val="115000"/>
+                        </a:lnSpc>
+                        <a:spcAft>
+                          <a:spcPts val="800"/>
+                        </a:spcAft>
+                      </a:pPr>
+                      <a:r>
+                        <a:rPr lang="en-KE" sz="900" kern="100">
+                          <a:effectLst/>
+                          <a:latin typeface="Century gothic" panose="020B0502020202020204" pitchFamily="34" charset="0"/>
+                        </a:rPr>
+                        <a:t>Week 1-2 (Feb 3 - Feb 16)</a:t>
+                      </a:r>
+                      <a:endParaRPr lang="en-KE" sz="900" kern="100">
+                        <a:effectLst/>
+                        <a:latin typeface="Century gothic" panose="020B0502020202020204" pitchFamily="34" charset="0"/>
+                        <a:ea typeface="Calibri" panose="020F0502020204030204" pitchFamily="34" charset="0"/>
+                        <a:cs typeface="Times New Roman" panose="02020603050405020304" pitchFamily="18" charset="0"/>
+                      </a:endParaRPr>
+                    </a:p>
+                  </a:txBody>
+                  <a:tcPr marL="6839" marR="6839" marT="6839" marB="6839" anchor="ctr">
+                    <a:lnL w="12700" cap="flat" cmpd="sng" algn="ctr">
+                      <a:solidFill>
+                        <a:schemeClr val="tx1"/>
+                      </a:solidFill>
+                      <a:prstDash val="solid"/>
+                      <a:round/>
+                      <a:headEnd type="none" w="med" len="med"/>
+                      <a:tailEnd type="none" w="med" len="med"/>
+                    </a:lnL>
+                    <a:lnR w="12700" cap="flat" cmpd="sng" algn="ctr">
+                      <a:solidFill>
+                        <a:schemeClr val="tx1"/>
+                      </a:solidFill>
+                      <a:prstDash val="solid"/>
+                      <a:round/>
+                      <a:headEnd type="none" w="med" len="med"/>
+                      <a:tailEnd type="none" w="med" len="med"/>
+                    </a:lnR>
+                    <a:lnT w="12700" cap="flat" cmpd="sng" algn="ctr">
+                      <a:solidFill>
+                        <a:schemeClr val="tx1"/>
+                      </a:solidFill>
+                      <a:prstDash val="solid"/>
+                      <a:round/>
+                      <a:headEnd type="none" w="med" len="med"/>
+                      <a:tailEnd type="none" w="med" len="med"/>
+                    </a:lnT>
+                    <a:lnB w="12700" cap="flat" cmpd="sng" algn="ctr">
+                      <a:solidFill>
+                        <a:schemeClr val="tx1"/>
+                      </a:solidFill>
+                      <a:prstDash val="solid"/>
+                      <a:round/>
+                      <a:headEnd type="none" w="med" len="med"/>
+                      <a:tailEnd type="none" w="med" len="med"/>
+                    </a:lnB>
+                    <a:solidFill>
+                      <a:srgbClr val="405037"/>
+                    </a:solidFill>
+                  </a:tcPr>
+                </a:tc>
+                <a:tc>
+                  <a:txBody>
+                    <a:bodyPr/>
+                    <a:lstStyle/>
+                    <a:p>
+                      <a:pPr>
+                        <a:lnSpc>
+                          <a:spcPct val="115000"/>
+                        </a:lnSpc>
+                        <a:spcAft>
+                          <a:spcPts val="800"/>
+                        </a:spcAft>
+                      </a:pPr>
+                      <a:r>
+                        <a:rPr lang="en-KE" sz="900" kern="100" dirty="0">
+                          <a:effectLst/>
+                          <a:latin typeface="Century gothic" panose="020B0502020202020204" pitchFamily="34" charset="0"/>
+                        </a:rPr>
+                        <a:t>Project Planning &amp; Setup</a:t>
+                      </a:r>
+                      <a:endParaRPr lang="en-KE" sz="900" kern="100" dirty="0">
+                        <a:effectLst/>
+                        <a:latin typeface="Century gothic" panose="020B0502020202020204" pitchFamily="34" charset="0"/>
+                        <a:ea typeface="Calibri" panose="020F0502020204030204" pitchFamily="34" charset="0"/>
+                        <a:cs typeface="Times New Roman" panose="02020603050405020304" pitchFamily="18" charset="0"/>
+                      </a:endParaRPr>
+                    </a:p>
+                  </a:txBody>
+                  <a:tcPr marL="6839" marR="6839" marT="6839" marB="6839" anchor="ctr">
+                    <a:lnL w="12700" cap="flat" cmpd="sng" algn="ctr">
+                      <a:solidFill>
+                        <a:schemeClr val="tx1"/>
+                      </a:solidFill>
+                      <a:prstDash val="solid"/>
+                      <a:round/>
+                      <a:headEnd type="none" w="med" len="med"/>
+                      <a:tailEnd type="none" w="med" len="med"/>
+                    </a:lnL>
+                    <a:lnR w="12700" cap="flat" cmpd="sng" algn="ctr">
+                      <a:solidFill>
+                        <a:schemeClr val="tx1"/>
+                      </a:solidFill>
+                      <a:prstDash val="solid"/>
+                      <a:round/>
+                      <a:headEnd type="none" w="med" len="med"/>
+                      <a:tailEnd type="none" w="med" len="med"/>
+                    </a:lnR>
+                    <a:lnT w="12700" cap="flat" cmpd="sng" algn="ctr">
+                      <a:solidFill>
+                        <a:schemeClr val="tx1"/>
+                      </a:solidFill>
+                      <a:prstDash val="solid"/>
+                      <a:round/>
+                      <a:headEnd type="none" w="med" len="med"/>
+                      <a:tailEnd type="none" w="med" len="med"/>
+                    </a:lnT>
+                    <a:lnB w="12700" cap="flat" cmpd="sng" algn="ctr">
+                      <a:solidFill>
+                        <a:schemeClr val="tx1"/>
+                      </a:solidFill>
+                      <a:prstDash val="solid"/>
+                      <a:round/>
+                      <a:headEnd type="none" w="med" len="med"/>
+                      <a:tailEnd type="none" w="med" len="med"/>
+                    </a:lnB>
+                    <a:solidFill>
+                      <a:srgbClr val="405037"/>
+                    </a:solidFill>
+                  </a:tcPr>
+                </a:tc>
+                <a:tc>
+                  <a:txBody>
+                    <a:bodyPr/>
+                    <a:lstStyle/>
+                    <a:p>
+                      <a:pPr marL="171450" indent="-171450">
+                        <a:lnSpc>
+                          <a:spcPct val="115000"/>
+                        </a:lnSpc>
+                        <a:spcAft>
+                          <a:spcPts val="800"/>
+                        </a:spcAft>
+                        <a:buFontTx/>
+                        <a:buChar char="-"/>
+                      </a:pPr>
+                      <a:r>
+                        <a:rPr lang="en-KE" sz="900" kern="100" dirty="0">
+                          <a:effectLst/>
+                          <a:latin typeface="Century gothic" panose="020B0502020202020204" pitchFamily="34" charset="0"/>
+                        </a:rPr>
+                        <a:t>Define project goals and objectives </a:t>
+                      </a:r>
+                      <a:endParaRPr lang="en-US" sz="900" kern="100" dirty="0">
+                        <a:effectLst/>
+                        <a:latin typeface="Century gothic" panose="020B0502020202020204" pitchFamily="34" charset="0"/>
+                      </a:endParaRPr>
+                    </a:p>
+                    <a:p>
+                      <a:pPr marL="0" indent="0">
+                        <a:lnSpc>
+                          <a:spcPct val="115000"/>
+                        </a:lnSpc>
+                        <a:spcAft>
+                          <a:spcPts val="800"/>
+                        </a:spcAft>
+                        <a:buFontTx/>
+                        <a:buNone/>
+                      </a:pPr>
+                      <a:r>
+                        <a:rPr lang="en-KE" sz="900" kern="100" dirty="0">
+                          <a:effectLst/>
+                          <a:latin typeface="Century gothic" panose="020B0502020202020204" pitchFamily="34" charset="0"/>
+                        </a:rPr>
+                        <a:t>- Form the development team </a:t>
+                      </a:r>
+                    </a:p>
+                    <a:p>
+                      <a:pPr>
+                        <a:lnSpc>
+                          <a:spcPct val="115000"/>
+                        </a:lnSpc>
+                        <a:spcAft>
+                          <a:spcPts val="800"/>
+                        </a:spcAft>
+                      </a:pPr>
+                      <a:r>
+                        <a:rPr lang="en-KE" sz="900" kern="100" dirty="0">
+                          <a:effectLst/>
+                          <a:latin typeface="Century gothic" panose="020B0502020202020204" pitchFamily="34" charset="0"/>
+                        </a:rPr>
+                        <a:t>- Set up Trello for task management </a:t>
+                      </a:r>
+                      <a:endParaRPr lang="en-KE" sz="900" kern="100" dirty="0">
+                        <a:effectLst/>
+                        <a:latin typeface="Century gothic" panose="020B0502020202020204" pitchFamily="34" charset="0"/>
+                        <a:ea typeface="Calibri" panose="020F0502020204030204" pitchFamily="34" charset="0"/>
+                        <a:cs typeface="Times New Roman" panose="02020603050405020304" pitchFamily="18" charset="0"/>
+                      </a:endParaRPr>
+                    </a:p>
+                  </a:txBody>
+                  <a:tcPr marL="6839" marR="6839" marT="6839" marB="6839" anchor="ctr">
+                    <a:lnL w="12700" cap="flat" cmpd="sng" algn="ctr">
+                      <a:solidFill>
+                        <a:schemeClr val="tx1"/>
+                      </a:solidFill>
+                      <a:prstDash val="solid"/>
+                      <a:round/>
+                      <a:headEnd type="none" w="med" len="med"/>
+                      <a:tailEnd type="none" w="med" len="med"/>
+                    </a:lnL>
+                    <a:lnR w="12700" cap="flat" cmpd="sng" algn="ctr">
+                      <a:solidFill>
+                        <a:schemeClr val="tx1"/>
+                      </a:solidFill>
+                      <a:prstDash val="solid"/>
+                      <a:round/>
+                      <a:headEnd type="none" w="med" len="med"/>
+                      <a:tailEnd type="none" w="med" len="med"/>
+                    </a:lnR>
+                    <a:lnT w="12700" cap="flat" cmpd="sng" algn="ctr">
+                      <a:solidFill>
+                        <a:schemeClr val="tx1"/>
+                      </a:solidFill>
+                      <a:prstDash val="solid"/>
+                      <a:round/>
+                      <a:headEnd type="none" w="med" len="med"/>
+                      <a:tailEnd type="none" w="med" len="med"/>
+                    </a:lnT>
+                    <a:lnB w="12700" cap="flat" cmpd="sng" algn="ctr">
+                      <a:solidFill>
+                        <a:schemeClr val="tx1"/>
+                      </a:solidFill>
+                      <a:prstDash val="solid"/>
+                      <a:round/>
+                      <a:headEnd type="none" w="med" len="med"/>
+                      <a:tailEnd type="none" w="med" len="med"/>
+                    </a:lnB>
+                    <a:solidFill>
+                      <a:srgbClr val="405037"/>
+                    </a:solidFill>
+                  </a:tcPr>
+                </a:tc>
+                <a:extLst>
+                  <a:ext uri="{0D108BD9-81ED-4DB2-BD59-A6C34878D82A}">
+                    <a16:rowId xmlns:a16="http://schemas.microsoft.com/office/drawing/2014/main" val="775888574"/>
+                  </a:ext>
+                </a:extLst>
+              </a:tr>
+              <a:tr h="788877">
+                <a:tc>
+                  <a:txBody>
+                    <a:bodyPr/>
+                    <a:lstStyle/>
+                    <a:p>
+                      <a:pPr>
+                        <a:lnSpc>
+                          <a:spcPct val="115000"/>
+                        </a:lnSpc>
+                        <a:spcAft>
+                          <a:spcPts val="800"/>
+                        </a:spcAft>
+                      </a:pPr>
+                      <a:r>
+                        <a:rPr lang="en-KE" sz="900" kern="100" dirty="0">
+                          <a:effectLst/>
+                          <a:latin typeface="Century gothic" panose="020B0502020202020204" pitchFamily="34" charset="0"/>
+                        </a:rPr>
+                        <a:t>Week 3-4 (Feb 17 - Mar 2)</a:t>
+                      </a:r>
+                      <a:endParaRPr lang="en-KE" sz="900" kern="100" dirty="0">
+                        <a:effectLst/>
+                        <a:latin typeface="Century gothic" panose="020B0502020202020204" pitchFamily="34" charset="0"/>
+                        <a:ea typeface="Calibri" panose="020F0502020204030204" pitchFamily="34" charset="0"/>
+                        <a:cs typeface="Times New Roman" panose="02020603050405020304" pitchFamily="18" charset="0"/>
+                      </a:endParaRPr>
+                    </a:p>
+                  </a:txBody>
+                  <a:tcPr marL="6839" marR="6839" marT="6839" marB="6839" anchor="ctr">
+                    <a:lnL w="12700" cap="flat" cmpd="sng" algn="ctr">
+                      <a:solidFill>
+                        <a:schemeClr val="tx1"/>
+                      </a:solidFill>
+                      <a:prstDash val="solid"/>
+                      <a:round/>
+                      <a:headEnd type="none" w="med" len="med"/>
+                      <a:tailEnd type="none" w="med" len="med"/>
+                    </a:lnL>
+                    <a:lnR w="12700" cap="flat" cmpd="sng" algn="ctr">
+                      <a:solidFill>
+                        <a:schemeClr val="tx1"/>
+                      </a:solidFill>
+                      <a:prstDash val="solid"/>
+                      <a:round/>
+                      <a:headEnd type="none" w="med" len="med"/>
+                      <a:tailEnd type="none" w="med" len="med"/>
+                    </a:lnR>
+                    <a:lnT w="12700" cap="flat" cmpd="sng" algn="ctr">
+                      <a:solidFill>
+                        <a:schemeClr val="tx1"/>
+                      </a:solidFill>
+                      <a:prstDash val="solid"/>
+                      <a:round/>
+                      <a:headEnd type="none" w="med" len="med"/>
+                      <a:tailEnd type="none" w="med" len="med"/>
+                    </a:lnT>
+                    <a:lnB w="12700" cap="flat" cmpd="sng" algn="ctr">
+                      <a:solidFill>
+                        <a:schemeClr val="tx1"/>
+                      </a:solidFill>
+                      <a:prstDash val="solid"/>
+                      <a:round/>
+                      <a:headEnd type="none" w="med" len="med"/>
+                      <a:tailEnd type="none" w="med" len="med"/>
+                    </a:lnB>
+                    <a:solidFill>
+                      <a:srgbClr val="405037"/>
+                    </a:solidFill>
+                  </a:tcPr>
+                </a:tc>
+                <a:tc>
+                  <a:txBody>
+                    <a:bodyPr/>
+                    <a:lstStyle/>
+                    <a:p>
+                      <a:pPr>
+                        <a:lnSpc>
+                          <a:spcPct val="115000"/>
+                        </a:lnSpc>
+                        <a:spcAft>
+                          <a:spcPts val="800"/>
+                        </a:spcAft>
+                      </a:pPr>
+                      <a:r>
+                        <a:rPr lang="en-KE" sz="900" kern="100">
+                          <a:effectLst/>
+                          <a:latin typeface="Century gothic" panose="020B0502020202020204" pitchFamily="34" charset="0"/>
+                        </a:rPr>
+                        <a:t>System Design &amp; Documentation</a:t>
+                      </a:r>
+                      <a:endParaRPr lang="en-KE" sz="900" kern="100">
+                        <a:effectLst/>
+                        <a:latin typeface="Century gothic" panose="020B0502020202020204" pitchFamily="34" charset="0"/>
+                        <a:ea typeface="Calibri" panose="020F0502020204030204" pitchFamily="34" charset="0"/>
+                        <a:cs typeface="Times New Roman" panose="02020603050405020304" pitchFamily="18" charset="0"/>
+                      </a:endParaRPr>
+                    </a:p>
+                  </a:txBody>
+                  <a:tcPr marL="6839" marR="6839" marT="6839" marB="6839" anchor="ctr">
+                    <a:lnL w="12700" cap="flat" cmpd="sng" algn="ctr">
+                      <a:solidFill>
+                        <a:schemeClr val="tx1"/>
+                      </a:solidFill>
+                      <a:prstDash val="solid"/>
+                      <a:round/>
+                      <a:headEnd type="none" w="med" len="med"/>
+                      <a:tailEnd type="none" w="med" len="med"/>
+                    </a:lnL>
+                    <a:lnR w="12700" cap="flat" cmpd="sng" algn="ctr">
+                      <a:solidFill>
+                        <a:schemeClr val="tx1"/>
+                      </a:solidFill>
+                      <a:prstDash val="solid"/>
+                      <a:round/>
+                      <a:headEnd type="none" w="med" len="med"/>
+                      <a:tailEnd type="none" w="med" len="med"/>
+                    </a:lnR>
+                    <a:lnT w="12700" cap="flat" cmpd="sng" algn="ctr">
+                      <a:solidFill>
+                        <a:schemeClr val="tx1"/>
+                      </a:solidFill>
+                      <a:prstDash val="solid"/>
+                      <a:round/>
+                      <a:headEnd type="none" w="med" len="med"/>
+                      <a:tailEnd type="none" w="med" len="med"/>
+                    </a:lnT>
+                    <a:lnB w="12700" cap="flat" cmpd="sng" algn="ctr">
+                      <a:solidFill>
+                        <a:schemeClr val="tx1"/>
+                      </a:solidFill>
+                      <a:prstDash val="solid"/>
+                      <a:round/>
+                      <a:headEnd type="none" w="med" len="med"/>
+                      <a:tailEnd type="none" w="med" len="med"/>
+                    </a:lnB>
+                    <a:solidFill>
+                      <a:srgbClr val="405037"/>
+                    </a:solidFill>
+                  </a:tcPr>
+                </a:tc>
+                <a:tc>
+                  <a:txBody>
+                    <a:bodyPr/>
+                    <a:lstStyle/>
+                    <a:p>
+                      <a:pPr>
+                        <a:lnSpc>
+                          <a:spcPct val="115000"/>
+                        </a:lnSpc>
+                        <a:spcAft>
+                          <a:spcPts val="800"/>
+                        </a:spcAft>
+                      </a:pPr>
+                      <a:r>
+                        <a:rPr lang="en-KE" sz="900" kern="100" dirty="0">
+                          <a:effectLst/>
+                          <a:latin typeface="Century gothic" panose="020B0502020202020204" pitchFamily="34" charset="0"/>
+                        </a:rPr>
+                        <a:t>- Develop system architecture and database schema </a:t>
+                      </a:r>
+                    </a:p>
+                    <a:p>
+                      <a:pPr marL="0" indent="0">
+                        <a:lnSpc>
+                          <a:spcPct val="115000"/>
+                        </a:lnSpc>
+                        <a:spcAft>
+                          <a:spcPts val="800"/>
+                        </a:spcAft>
+                        <a:buFontTx/>
+                        <a:buNone/>
+                      </a:pPr>
+                      <a:r>
+                        <a:rPr lang="en-US" sz="900" kern="100" dirty="0">
+                          <a:effectLst/>
+                          <a:latin typeface="Century gothic" panose="020B0502020202020204" pitchFamily="34" charset="0"/>
+                        </a:rPr>
+                        <a:t>- </a:t>
+                      </a:r>
+                      <a:r>
+                        <a:rPr lang="en-KE" sz="900" kern="100" dirty="0">
+                          <a:effectLst/>
+                          <a:latin typeface="Century gothic" panose="020B0502020202020204" pitchFamily="34" charset="0"/>
+                        </a:rPr>
+                        <a:t>Create wireframes and UI mock-ups </a:t>
+                      </a:r>
+                      <a:endParaRPr lang="en-US" sz="900" kern="100" dirty="0">
+                        <a:effectLst/>
+                        <a:latin typeface="Century gothic" panose="020B0502020202020204" pitchFamily="34" charset="0"/>
+                      </a:endParaRPr>
+                    </a:p>
+                    <a:p>
+                      <a:pPr marL="0" indent="0">
+                        <a:lnSpc>
+                          <a:spcPct val="115000"/>
+                        </a:lnSpc>
+                        <a:spcAft>
+                          <a:spcPts val="800"/>
+                        </a:spcAft>
+                        <a:buFontTx/>
+                        <a:buNone/>
+                      </a:pPr>
+                      <a:r>
+                        <a:rPr lang="en-US" sz="900" kern="100" dirty="0">
+                          <a:effectLst/>
+                          <a:latin typeface="Century gothic" panose="020B0502020202020204" pitchFamily="34" charset="0"/>
+                        </a:rPr>
+                        <a:t>- Setup</a:t>
+                      </a:r>
+                      <a:r>
+                        <a:rPr lang="en-KE" sz="900" kern="100" dirty="0">
+                          <a:effectLst/>
+                          <a:latin typeface="Century gothic" panose="020B0502020202020204" pitchFamily="34" charset="0"/>
+                        </a:rPr>
+                        <a:t>GitHub for version control</a:t>
+                      </a:r>
+                    </a:p>
+                    <a:p>
+                      <a:pPr>
+                        <a:lnSpc>
+                          <a:spcPct val="115000"/>
+                        </a:lnSpc>
+                        <a:spcAft>
+                          <a:spcPts val="800"/>
+                        </a:spcAft>
+                      </a:pPr>
+                      <a:r>
+                        <a:rPr lang="en-KE" sz="900" kern="100" dirty="0">
+                          <a:effectLst/>
+                          <a:latin typeface="Century gothic" panose="020B0502020202020204" pitchFamily="34" charset="0"/>
+                        </a:rPr>
+                        <a:t>- Design user interfaces - Draft and finalize the project proposal</a:t>
+                      </a:r>
+                      <a:endParaRPr lang="en-KE" sz="900" kern="100" dirty="0">
+                        <a:effectLst/>
+                        <a:latin typeface="Century gothic" panose="020B0502020202020204" pitchFamily="34" charset="0"/>
+                        <a:ea typeface="Calibri" panose="020F0502020204030204" pitchFamily="34" charset="0"/>
+                        <a:cs typeface="Times New Roman" panose="02020603050405020304" pitchFamily="18" charset="0"/>
+                      </a:endParaRPr>
+                    </a:p>
+                  </a:txBody>
+                  <a:tcPr marL="6839" marR="6839" marT="6839" marB="6839" anchor="ctr">
+                    <a:lnL w="12700" cap="flat" cmpd="sng" algn="ctr">
+                      <a:solidFill>
+                        <a:schemeClr val="tx1"/>
+                      </a:solidFill>
+                      <a:prstDash val="solid"/>
+                      <a:round/>
+                      <a:headEnd type="none" w="med" len="med"/>
+                      <a:tailEnd type="none" w="med" len="med"/>
+                    </a:lnL>
+                    <a:lnR w="12700" cap="flat" cmpd="sng" algn="ctr">
+                      <a:solidFill>
+                        <a:schemeClr val="tx1"/>
+                      </a:solidFill>
+                      <a:prstDash val="solid"/>
+                      <a:round/>
+                      <a:headEnd type="none" w="med" len="med"/>
+                      <a:tailEnd type="none" w="med" len="med"/>
+                    </a:lnR>
+                    <a:lnT w="12700" cap="flat" cmpd="sng" algn="ctr">
+                      <a:solidFill>
+                        <a:schemeClr val="tx1"/>
+                      </a:solidFill>
+                      <a:prstDash val="solid"/>
+                      <a:round/>
+                      <a:headEnd type="none" w="med" len="med"/>
+                      <a:tailEnd type="none" w="med" len="med"/>
+                    </a:lnT>
+                    <a:lnB w="12700" cap="flat" cmpd="sng" algn="ctr">
+                      <a:solidFill>
+                        <a:schemeClr val="tx1"/>
+                      </a:solidFill>
+                      <a:prstDash val="solid"/>
+                      <a:round/>
+                      <a:headEnd type="none" w="med" len="med"/>
+                      <a:tailEnd type="none" w="med" len="med"/>
+                    </a:lnB>
+                    <a:solidFill>
+                      <a:srgbClr val="405037"/>
+                    </a:solidFill>
+                  </a:tcPr>
+                </a:tc>
+                <a:extLst>
+                  <a:ext uri="{0D108BD9-81ED-4DB2-BD59-A6C34878D82A}">
+                    <a16:rowId xmlns:a16="http://schemas.microsoft.com/office/drawing/2014/main" val="3100060370"/>
+                  </a:ext>
+                </a:extLst>
+              </a:tr>
+              <a:tr h="488377">
+                <a:tc>
+                  <a:txBody>
+                    <a:bodyPr/>
+                    <a:lstStyle/>
+                    <a:p>
+                      <a:pPr>
+                        <a:lnSpc>
+                          <a:spcPct val="115000"/>
+                        </a:lnSpc>
+                        <a:spcAft>
+                          <a:spcPts val="800"/>
+                        </a:spcAft>
+                      </a:pPr>
+                      <a:r>
+                        <a:rPr lang="en-KE" sz="900" kern="100">
+                          <a:effectLst/>
+                          <a:latin typeface="Century gothic" panose="020B0502020202020204" pitchFamily="34" charset="0"/>
+                        </a:rPr>
+                        <a:t>Week 5-6 (Mar 3 - Mar 16)</a:t>
+                      </a:r>
+                      <a:endParaRPr lang="en-KE" sz="900" kern="100">
+                        <a:effectLst/>
+                        <a:latin typeface="Century gothic" panose="020B0502020202020204" pitchFamily="34" charset="0"/>
+                        <a:ea typeface="Calibri" panose="020F0502020204030204" pitchFamily="34" charset="0"/>
+                        <a:cs typeface="Times New Roman" panose="02020603050405020304" pitchFamily="18" charset="0"/>
+                      </a:endParaRPr>
+                    </a:p>
+                  </a:txBody>
+                  <a:tcPr marL="6839" marR="6839" marT="6839" marB="6839" anchor="ctr">
+                    <a:lnL w="12700" cap="flat" cmpd="sng" algn="ctr">
+                      <a:solidFill>
+                        <a:schemeClr val="tx1"/>
+                      </a:solidFill>
+                      <a:prstDash val="solid"/>
+                      <a:round/>
+                      <a:headEnd type="none" w="med" len="med"/>
+                      <a:tailEnd type="none" w="med" len="med"/>
+                    </a:lnL>
+                    <a:lnR w="12700" cap="flat" cmpd="sng" algn="ctr">
+                      <a:solidFill>
+                        <a:schemeClr val="tx1"/>
+                      </a:solidFill>
+                      <a:prstDash val="solid"/>
+                      <a:round/>
+                      <a:headEnd type="none" w="med" len="med"/>
+                      <a:tailEnd type="none" w="med" len="med"/>
+                    </a:lnR>
+                    <a:lnT w="12700" cap="flat" cmpd="sng" algn="ctr">
+                      <a:solidFill>
+                        <a:schemeClr val="tx1"/>
+                      </a:solidFill>
+                      <a:prstDash val="solid"/>
+                      <a:round/>
+                      <a:headEnd type="none" w="med" len="med"/>
+                      <a:tailEnd type="none" w="med" len="med"/>
+                    </a:lnT>
+                    <a:lnB w="12700" cap="flat" cmpd="sng" algn="ctr">
+                      <a:solidFill>
+                        <a:schemeClr val="tx1"/>
+                      </a:solidFill>
+                      <a:prstDash val="solid"/>
+                      <a:round/>
+                      <a:headEnd type="none" w="med" len="med"/>
+                      <a:tailEnd type="none" w="med" len="med"/>
+                    </a:lnB>
+                    <a:solidFill>
+                      <a:srgbClr val="405037"/>
+                    </a:solidFill>
+                  </a:tcPr>
+                </a:tc>
+                <a:tc>
+                  <a:txBody>
+                    <a:bodyPr/>
+                    <a:lstStyle/>
+                    <a:p>
+                      <a:pPr>
+                        <a:lnSpc>
+                          <a:spcPct val="115000"/>
+                        </a:lnSpc>
+                        <a:spcAft>
+                          <a:spcPts val="800"/>
+                        </a:spcAft>
+                      </a:pPr>
+                      <a:r>
+                        <a:rPr lang="en-KE" sz="900" kern="100">
+                          <a:effectLst/>
+                          <a:latin typeface="Century gothic" panose="020B0502020202020204" pitchFamily="34" charset="0"/>
+                        </a:rPr>
+                        <a:t>Research &amp; Literature Review</a:t>
+                      </a:r>
+                      <a:endParaRPr lang="en-KE" sz="900" kern="100">
+                        <a:effectLst/>
+                        <a:latin typeface="Century gothic" panose="020B0502020202020204" pitchFamily="34" charset="0"/>
+                        <a:ea typeface="Calibri" panose="020F0502020204030204" pitchFamily="34" charset="0"/>
+                        <a:cs typeface="Times New Roman" panose="02020603050405020304" pitchFamily="18" charset="0"/>
+                      </a:endParaRPr>
+                    </a:p>
+                  </a:txBody>
+                  <a:tcPr marL="6839" marR="6839" marT="6839" marB="6839" anchor="ctr">
+                    <a:lnL w="12700" cap="flat" cmpd="sng" algn="ctr">
+                      <a:solidFill>
+                        <a:schemeClr val="tx1"/>
+                      </a:solidFill>
+                      <a:prstDash val="solid"/>
+                      <a:round/>
+                      <a:headEnd type="none" w="med" len="med"/>
+                      <a:tailEnd type="none" w="med" len="med"/>
+                    </a:lnL>
+                    <a:lnR w="12700" cap="flat" cmpd="sng" algn="ctr">
+                      <a:solidFill>
+                        <a:schemeClr val="tx1"/>
+                      </a:solidFill>
+                      <a:prstDash val="solid"/>
+                      <a:round/>
+                      <a:headEnd type="none" w="med" len="med"/>
+                      <a:tailEnd type="none" w="med" len="med"/>
+                    </a:lnR>
+                    <a:lnT w="12700" cap="flat" cmpd="sng" algn="ctr">
+                      <a:solidFill>
+                        <a:schemeClr val="tx1"/>
+                      </a:solidFill>
+                      <a:prstDash val="solid"/>
+                      <a:round/>
+                      <a:headEnd type="none" w="med" len="med"/>
+                      <a:tailEnd type="none" w="med" len="med"/>
+                    </a:lnT>
+                    <a:lnB w="12700" cap="flat" cmpd="sng" algn="ctr">
+                      <a:solidFill>
+                        <a:schemeClr val="tx1"/>
+                      </a:solidFill>
+                      <a:prstDash val="solid"/>
+                      <a:round/>
+                      <a:headEnd type="none" w="med" len="med"/>
+                      <a:tailEnd type="none" w="med" len="med"/>
+                    </a:lnB>
+                    <a:solidFill>
+                      <a:srgbClr val="405037"/>
+                    </a:solidFill>
+                  </a:tcPr>
+                </a:tc>
+                <a:tc>
+                  <a:txBody>
+                    <a:bodyPr/>
+                    <a:lstStyle/>
+                    <a:p>
+                      <a:pPr>
+                        <a:lnSpc>
+                          <a:spcPct val="115000"/>
+                        </a:lnSpc>
+                        <a:spcAft>
+                          <a:spcPts val="800"/>
+                        </a:spcAft>
+                      </a:pPr>
+                      <a:r>
+                        <a:rPr lang="en-KE" sz="900" kern="100" dirty="0">
+                          <a:effectLst/>
+                          <a:latin typeface="Century gothic" panose="020B0502020202020204" pitchFamily="34" charset="0"/>
+                        </a:rPr>
+                        <a:t>- Study relevant scientific papers </a:t>
+                      </a:r>
+                    </a:p>
+                    <a:p>
+                      <a:pPr>
+                        <a:lnSpc>
+                          <a:spcPct val="115000"/>
+                        </a:lnSpc>
+                        <a:spcAft>
+                          <a:spcPts val="800"/>
+                        </a:spcAft>
+                      </a:pPr>
+                      <a:r>
+                        <a:rPr lang="en-KE" sz="900" kern="100" dirty="0">
+                          <a:effectLst/>
+                          <a:latin typeface="Century gothic" panose="020B0502020202020204" pitchFamily="34" charset="0"/>
+                        </a:rPr>
+                        <a:t>- Start drafting a research paper on the project methodology</a:t>
+                      </a:r>
+                      <a:endParaRPr lang="en-KE" sz="900" kern="100" dirty="0">
+                        <a:effectLst/>
+                        <a:latin typeface="Century gothic" panose="020B0502020202020204" pitchFamily="34" charset="0"/>
+                        <a:ea typeface="Calibri" panose="020F0502020204030204" pitchFamily="34" charset="0"/>
+                        <a:cs typeface="Times New Roman" panose="02020603050405020304" pitchFamily="18" charset="0"/>
+                      </a:endParaRPr>
+                    </a:p>
+                  </a:txBody>
+                  <a:tcPr marL="6839" marR="6839" marT="6839" marB="6839" anchor="ctr">
+                    <a:lnL w="12700" cap="flat" cmpd="sng" algn="ctr">
+                      <a:solidFill>
+                        <a:schemeClr val="tx1"/>
+                      </a:solidFill>
+                      <a:prstDash val="solid"/>
+                      <a:round/>
+                      <a:headEnd type="none" w="med" len="med"/>
+                      <a:tailEnd type="none" w="med" len="med"/>
+                    </a:lnL>
+                    <a:lnR w="12700" cap="flat" cmpd="sng" algn="ctr">
+                      <a:solidFill>
+                        <a:schemeClr val="tx1"/>
+                      </a:solidFill>
+                      <a:prstDash val="solid"/>
+                      <a:round/>
+                      <a:headEnd type="none" w="med" len="med"/>
+                      <a:tailEnd type="none" w="med" len="med"/>
+                    </a:lnR>
+                    <a:lnT w="12700" cap="flat" cmpd="sng" algn="ctr">
+                      <a:solidFill>
+                        <a:schemeClr val="tx1"/>
+                      </a:solidFill>
+                      <a:prstDash val="solid"/>
+                      <a:round/>
+                      <a:headEnd type="none" w="med" len="med"/>
+                      <a:tailEnd type="none" w="med" len="med"/>
+                    </a:lnT>
+                    <a:lnB w="12700" cap="flat" cmpd="sng" algn="ctr">
+                      <a:solidFill>
+                        <a:schemeClr val="tx1"/>
+                      </a:solidFill>
+                      <a:prstDash val="solid"/>
+                      <a:round/>
+                      <a:headEnd type="none" w="med" len="med"/>
+                      <a:tailEnd type="none" w="med" len="med"/>
+                    </a:lnB>
+                    <a:solidFill>
+                      <a:srgbClr val="405037"/>
+                    </a:solidFill>
+                  </a:tcPr>
+                </a:tc>
+                <a:extLst>
+                  <a:ext uri="{0D108BD9-81ED-4DB2-BD59-A6C34878D82A}">
+                    <a16:rowId xmlns:a16="http://schemas.microsoft.com/office/drawing/2014/main" val="129228285"/>
+                  </a:ext>
+                </a:extLst>
+              </a:tr>
+              <a:tr h="488377">
+                <a:tc>
+                  <a:txBody>
+                    <a:bodyPr/>
+                    <a:lstStyle/>
+                    <a:p>
+                      <a:pPr>
+                        <a:lnSpc>
+                          <a:spcPct val="115000"/>
+                        </a:lnSpc>
+                        <a:spcAft>
+                          <a:spcPts val="800"/>
+                        </a:spcAft>
+                      </a:pPr>
+                      <a:r>
+                        <a:rPr lang="en-KE" sz="900" kern="100">
+                          <a:effectLst/>
+                          <a:latin typeface="Century gothic" panose="020B0502020202020204" pitchFamily="34" charset="0"/>
+                        </a:rPr>
+                        <a:t>Week 7-9 (Mar 17 - Apr 6)</a:t>
+                      </a:r>
+                      <a:endParaRPr lang="en-KE" sz="900" kern="100">
+                        <a:effectLst/>
+                        <a:latin typeface="Century gothic" panose="020B0502020202020204" pitchFamily="34" charset="0"/>
+                        <a:ea typeface="Calibri" panose="020F0502020204030204" pitchFamily="34" charset="0"/>
+                        <a:cs typeface="Times New Roman" panose="02020603050405020304" pitchFamily="18" charset="0"/>
+                      </a:endParaRPr>
+                    </a:p>
+                  </a:txBody>
+                  <a:tcPr marL="6839" marR="6839" marT="6839" marB="6839" anchor="ctr">
+                    <a:lnL w="12700" cap="flat" cmpd="sng" algn="ctr">
+                      <a:solidFill>
+                        <a:schemeClr val="tx1"/>
+                      </a:solidFill>
+                      <a:prstDash val="solid"/>
+                      <a:round/>
+                      <a:headEnd type="none" w="med" len="med"/>
+                      <a:tailEnd type="none" w="med" len="med"/>
+                    </a:lnL>
+                    <a:lnR w="12700" cap="flat" cmpd="sng" algn="ctr">
+                      <a:solidFill>
+                        <a:schemeClr val="tx1"/>
+                      </a:solidFill>
+                      <a:prstDash val="solid"/>
+                      <a:round/>
+                      <a:headEnd type="none" w="med" len="med"/>
+                      <a:tailEnd type="none" w="med" len="med"/>
+                    </a:lnR>
+                    <a:lnT w="12700" cap="flat" cmpd="sng" algn="ctr">
+                      <a:solidFill>
+                        <a:schemeClr val="tx1"/>
+                      </a:solidFill>
+                      <a:prstDash val="solid"/>
+                      <a:round/>
+                      <a:headEnd type="none" w="med" len="med"/>
+                      <a:tailEnd type="none" w="med" len="med"/>
+                    </a:lnT>
+                    <a:lnB w="12700" cap="flat" cmpd="sng" algn="ctr">
+                      <a:solidFill>
+                        <a:schemeClr val="tx1"/>
+                      </a:solidFill>
+                      <a:prstDash val="solid"/>
+                      <a:round/>
+                      <a:headEnd type="none" w="med" len="med"/>
+                      <a:tailEnd type="none" w="med" len="med"/>
+                    </a:lnB>
+                    <a:solidFill>
+                      <a:srgbClr val="405037"/>
+                    </a:solidFill>
+                  </a:tcPr>
+                </a:tc>
+                <a:tc>
+                  <a:txBody>
+                    <a:bodyPr/>
+                    <a:lstStyle/>
+                    <a:p>
+                      <a:pPr>
+                        <a:lnSpc>
+                          <a:spcPct val="115000"/>
+                        </a:lnSpc>
+                        <a:spcAft>
+                          <a:spcPts val="800"/>
+                        </a:spcAft>
+                      </a:pPr>
+                      <a:r>
+                        <a:rPr lang="en-KE" sz="900" kern="100">
+                          <a:effectLst/>
+                          <a:latin typeface="Century gothic" panose="020B0502020202020204" pitchFamily="34" charset="0"/>
+                        </a:rPr>
+                        <a:t>Core Development Phase</a:t>
+                      </a:r>
+                      <a:endParaRPr lang="en-KE" sz="900" kern="100">
+                        <a:effectLst/>
+                        <a:latin typeface="Century gothic" panose="020B0502020202020204" pitchFamily="34" charset="0"/>
+                        <a:ea typeface="Calibri" panose="020F0502020204030204" pitchFamily="34" charset="0"/>
+                        <a:cs typeface="Times New Roman" panose="02020603050405020304" pitchFamily="18" charset="0"/>
+                      </a:endParaRPr>
+                    </a:p>
+                  </a:txBody>
+                  <a:tcPr marL="6839" marR="6839" marT="6839" marB="6839" anchor="ctr">
+                    <a:lnL w="12700" cap="flat" cmpd="sng" algn="ctr">
+                      <a:solidFill>
+                        <a:schemeClr val="tx1"/>
+                      </a:solidFill>
+                      <a:prstDash val="solid"/>
+                      <a:round/>
+                      <a:headEnd type="none" w="med" len="med"/>
+                      <a:tailEnd type="none" w="med" len="med"/>
+                    </a:lnL>
+                    <a:lnR w="12700" cap="flat" cmpd="sng" algn="ctr">
+                      <a:solidFill>
+                        <a:schemeClr val="tx1"/>
+                      </a:solidFill>
+                      <a:prstDash val="solid"/>
+                      <a:round/>
+                      <a:headEnd type="none" w="med" len="med"/>
+                      <a:tailEnd type="none" w="med" len="med"/>
+                    </a:lnR>
+                    <a:lnT w="12700" cap="flat" cmpd="sng" algn="ctr">
+                      <a:solidFill>
+                        <a:schemeClr val="tx1"/>
+                      </a:solidFill>
+                      <a:prstDash val="solid"/>
+                      <a:round/>
+                      <a:headEnd type="none" w="med" len="med"/>
+                      <a:tailEnd type="none" w="med" len="med"/>
+                    </a:lnT>
+                    <a:lnB w="12700" cap="flat" cmpd="sng" algn="ctr">
+                      <a:solidFill>
+                        <a:schemeClr val="tx1"/>
+                      </a:solidFill>
+                      <a:prstDash val="solid"/>
+                      <a:round/>
+                      <a:headEnd type="none" w="med" len="med"/>
+                      <a:tailEnd type="none" w="med" len="med"/>
+                    </a:lnB>
+                    <a:solidFill>
+                      <a:srgbClr val="405037"/>
+                    </a:solidFill>
+                  </a:tcPr>
+                </a:tc>
+                <a:tc>
+                  <a:txBody>
+                    <a:bodyPr/>
+                    <a:lstStyle/>
+                    <a:p>
+                      <a:pPr>
+                        <a:lnSpc>
+                          <a:spcPct val="115000"/>
+                        </a:lnSpc>
+                        <a:spcAft>
+                          <a:spcPts val="800"/>
+                        </a:spcAft>
+                      </a:pPr>
+                      <a:r>
+                        <a:rPr lang="en-KE" sz="900" kern="100" dirty="0">
+                          <a:effectLst/>
+                          <a:latin typeface="Century gothic" panose="020B0502020202020204" pitchFamily="34" charset="0"/>
+                        </a:rPr>
+                        <a:t>- Implement core functionalities </a:t>
+                      </a:r>
+                    </a:p>
+                    <a:p>
+                      <a:pPr>
+                        <a:lnSpc>
+                          <a:spcPct val="115000"/>
+                        </a:lnSpc>
+                        <a:spcAft>
+                          <a:spcPts val="800"/>
+                        </a:spcAft>
+                      </a:pPr>
+                      <a:r>
+                        <a:rPr lang="en-KE" sz="900" kern="100" dirty="0">
+                          <a:effectLst/>
+                          <a:latin typeface="Century gothic" panose="020B0502020202020204" pitchFamily="34" charset="0"/>
+                        </a:rPr>
+                        <a:t>- Develop backend, frontend, authentication, and database</a:t>
+                      </a:r>
+                      <a:endParaRPr lang="en-KE" sz="900" kern="100" dirty="0">
+                        <a:effectLst/>
+                        <a:latin typeface="Century gothic" panose="020B0502020202020204" pitchFamily="34" charset="0"/>
+                        <a:ea typeface="Calibri" panose="020F0502020204030204" pitchFamily="34" charset="0"/>
+                        <a:cs typeface="Times New Roman" panose="02020603050405020304" pitchFamily="18" charset="0"/>
+                      </a:endParaRPr>
+                    </a:p>
+                  </a:txBody>
+                  <a:tcPr marL="6839" marR="6839" marT="6839" marB="6839" anchor="ctr">
+                    <a:lnL w="12700" cap="flat" cmpd="sng" algn="ctr">
+                      <a:solidFill>
+                        <a:schemeClr val="tx1"/>
+                      </a:solidFill>
+                      <a:prstDash val="solid"/>
+                      <a:round/>
+                      <a:headEnd type="none" w="med" len="med"/>
+                      <a:tailEnd type="none" w="med" len="med"/>
+                    </a:lnL>
+                    <a:lnR w="12700" cap="flat" cmpd="sng" algn="ctr">
+                      <a:solidFill>
+                        <a:schemeClr val="tx1"/>
+                      </a:solidFill>
+                      <a:prstDash val="solid"/>
+                      <a:round/>
+                      <a:headEnd type="none" w="med" len="med"/>
+                      <a:tailEnd type="none" w="med" len="med"/>
+                    </a:lnR>
+                    <a:lnT w="12700" cap="flat" cmpd="sng" algn="ctr">
+                      <a:solidFill>
+                        <a:schemeClr val="tx1"/>
+                      </a:solidFill>
+                      <a:prstDash val="solid"/>
+                      <a:round/>
+                      <a:headEnd type="none" w="med" len="med"/>
+                      <a:tailEnd type="none" w="med" len="med"/>
+                    </a:lnT>
+                    <a:lnB w="12700" cap="flat" cmpd="sng" algn="ctr">
+                      <a:solidFill>
+                        <a:schemeClr val="tx1"/>
+                      </a:solidFill>
+                      <a:prstDash val="solid"/>
+                      <a:round/>
+                      <a:headEnd type="none" w="med" len="med"/>
+                      <a:tailEnd type="none" w="med" len="med"/>
+                    </a:lnB>
+                    <a:solidFill>
+                      <a:srgbClr val="405037"/>
+                    </a:solidFill>
+                  </a:tcPr>
+                </a:tc>
+                <a:extLst>
+                  <a:ext uri="{0D108BD9-81ED-4DB2-BD59-A6C34878D82A}">
+                    <a16:rowId xmlns:a16="http://schemas.microsoft.com/office/drawing/2014/main" val="4065588464"/>
+                  </a:ext>
+                </a:extLst>
+              </a:tr>
+              <a:tr h="488377">
+                <a:tc>
+                  <a:txBody>
+                    <a:bodyPr/>
+                    <a:lstStyle/>
+                    <a:p>
+                      <a:pPr>
+                        <a:lnSpc>
+                          <a:spcPct val="115000"/>
+                        </a:lnSpc>
+                        <a:spcAft>
+                          <a:spcPts val="800"/>
+                        </a:spcAft>
+                      </a:pPr>
+                      <a:r>
+                        <a:rPr lang="en-KE" sz="900" kern="100">
+                          <a:effectLst/>
+                          <a:latin typeface="Century gothic" panose="020B0502020202020204" pitchFamily="34" charset="0"/>
+                        </a:rPr>
+                        <a:t>Week 10 (Apr 7 - Apr 13)</a:t>
+                      </a:r>
+                      <a:endParaRPr lang="en-KE" sz="900" kern="100">
+                        <a:effectLst/>
+                        <a:latin typeface="Century gothic" panose="020B0502020202020204" pitchFamily="34" charset="0"/>
+                        <a:ea typeface="Calibri" panose="020F0502020204030204" pitchFamily="34" charset="0"/>
+                        <a:cs typeface="Times New Roman" panose="02020603050405020304" pitchFamily="18" charset="0"/>
+                      </a:endParaRPr>
+                    </a:p>
+                  </a:txBody>
+                  <a:tcPr marL="6839" marR="6839" marT="6839" marB="6839" anchor="ctr">
+                    <a:lnL w="12700" cap="flat" cmpd="sng" algn="ctr">
+                      <a:solidFill>
+                        <a:schemeClr val="tx1"/>
+                      </a:solidFill>
+                      <a:prstDash val="solid"/>
+                      <a:round/>
+                      <a:headEnd type="none" w="med" len="med"/>
+                      <a:tailEnd type="none" w="med" len="med"/>
+                    </a:lnL>
+                    <a:lnR w="12700" cap="flat" cmpd="sng" algn="ctr">
+                      <a:solidFill>
+                        <a:schemeClr val="tx1"/>
+                      </a:solidFill>
+                      <a:prstDash val="solid"/>
+                      <a:round/>
+                      <a:headEnd type="none" w="med" len="med"/>
+                      <a:tailEnd type="none" w="med" len="med"/>
+                    </a:lnR>
+                    <a:lnT w="12700" cap="flat" cmpd="sng" algn="ctr">
+                      <a:solidFill>
+                        <a:schemeClr val="tx1"/>
+                      </a:solidFill>
+                      <a:prstDash val="solid"/>
+                      <a:round/>
+                      <a:headEnd type="none" w="med" len="med"/>
+                      <a:tailEnd type="none" w="med" len="med"/>
+                    </a:lnT>
+                    <a:lnB w="12700" cap="flat" cmpd="sng" algn="ctr">
+                      <a:solidFill>
+                        <a:schemeClr val="tx1"/>
+                      </a:solidFill>
+                      <a:prstDash val="solid"/>
+                      <a:round/>
+                      <a:headEnd type="none" w="med" len="med"/>
+                      <a:tailEnd type="none" w="med" len="med"/>
+                    </a:lnB>
+                    <a:solidFill>
+                      <a:srgbClr val="405037"/>
+                    </a:solidFill>
+                  </a:tcPr>
+                </a:tc>
+                <a:tc>
+                  <a:txBody>
+                    <a:bodyPr/>
+                    <a:lstStyle/>
+                    <a:p>
+                      <a:pPr>
+                        <a:lnSpc>
+                          <a:spcPct val="115000"/>
+                        </a:lnSpc>
+                        <a:spcAft>
+                          <a:spcPts val="800"/>
+                        </a:spcAft>
+                      </a:pPr>
+                      <a:r>
+                        <a:rPr lang="en-KE" sz="900" kern="100">
+                          <a:effectLst/>
+                          <a:latin typeface="Century gothic" panose="020B0502020202020204" pitchFamily="34" charset="0"/>
+                        </a:rPr>
+                        <a:t>Initial Demonstration &amp; Feedback</a:t>
+                      </a:r>
+                      <a:endParaRPr lang="en-KE" sz="900" kern="100">
+                        <a:effectLst/>
+                        <a:latin typeface="Century gothic" panose="020B0502020202020204" pitchFamily="34" charset="0"/>
+                        <a:ea typeface="Calibri" panose="020F0502020204030204" pitchFamily="34" charset="0"/>
+                        <a:cs typeface="Times New Roman" panose="02020603050405020304" pitchFamily="18" charset="0"/>
+                      </a:endParaRPr>
+                    </a:p>
+                  </a:txBody>
+                  <a:tcPr marL="6839" marR="6839" marT="6839" marB="6839" anchor="ctr">
+                    <a:lnL w="12700" cap="flat" cmpd="sng" algn="ctr">
+                      <a:solidFill>
+                        <a:schemeClr val="tx1"/>
+                      </a:solidFill>
+                      <a:prstDash val="solid"/>
+                      <a:round/>
+                      <a:headEnd type="none" w="med" len="med"/>
+                      <a:tailEnd type="none" w="med" len="med"/>
+                    </a:lnL>
+                    <a:lnR w="12700" cap="flat" cmpd="sng" algn="ctr">
+                      <a:solidFill>
+                        <a:schemeClr val="tx1"/>
+                      </a:solidFill>
+                      <a:prstDash val="solid"/>
+                      <a:round/>
+                      <a:headEnd type="none" w="med" len="med"/>
+                      <a:tailEnd type="none" w="med" len="med"/>
+                    </a:lnR>
+                    <a:lnT w="12700" cap="flat" cmpd="sng" algn="ctr">
+                      <a:solidFill>
+                        <a:schemeClr val="tx1"/>
+                      </a:solidFill>
+                      <a:prstDash val="solid"/>
+                      <a:round/>
+                      <a:headEnd type="none" w="med" len="med"/>
+                      <a:tailEnd type="none" w="med" len="med"/>
+                    </a:lnT>
+                    <a:lnB w="12700" cap="flat" cmpd="sng" algn="ctr">
+                      <a:solidFill>
+                        <a:schemeClr val="tx1"/>
+                      </a:solidFill>
+                      <a:prstDash val="solid"/>
+                      <a:round/>
+                      <a:headEnd type="none" w="med" len="med"/>
+                      <a:tailEnd type="none" w="med" len="med"/>
+                    </a:lnB>
+                    <a:solidFill>
+                      <a:srgbClr val="405037"/>
+                    </a:solidFill>
+                  </a:tcPr>
+                </a:tc>
+                <a:tc>
+                  <a:txBody>
+                    <a:bodyPr/>
+                    <a:lstStyle/>
+                    <a:p>
+                      <a:pPr>
+                        <a:lnSpc>
+                          <a:spcPct val="115000"/>
+                        </a:lnSpc>
+                        <a:spcAft>
+                          <a:spcPts val="800"/>
+                        </a:spcAft>
+                      </a:pPr>
+                      <a:r>
+                        <a:rPr lang="en-KE" sz="900" kern="100" dirty="0">
+                          <a:effectLst/>
+                          <a:latin typeface="Century gothic" panose="020B0502020202020204" pitchFamily="34" charset="0"/>
+                        </a:rPr>
+                        <a:t>- Conduct MVP demo </a:t>
+                      </a:r>
+                    </a:p>
+                    <a:p>
+                      <a:pPr>
+                        <a:lnSpc>
+                          <a:spcPct val="115000"/>
+                        </a:lnSpc>
+                        <a:spcAft>
+                          <a:spcPts val="800"/>
+                        </a:spcAft>
+                      </a:pPr>
+                      <a:r>
+                        <a:rPr lang="en-KE" sz="900" kern="100" dirty="0">
+                          <a:effectLst/>
+                          <a:latin typeface="Century gothic" panose="020B0502020202020204" pitchFamily="34" charset="0"/>
+                        </a:rPr>
+                        <a:t>- Collect feedback for refinement</a:t>
+                      </a:r>
+                      <a:endParaRPr lang="en-KE" sz="900" kern="100" dirty="0">
+                        <a:effectLst/>
+                        <a:latin typeface="Century gothic" panose="020B0502020202020204" pitchFamily="34" charset="0"/>
+                        <a:ea typeface="Calibri" panose="020F0502020204030204" pitchFamily="34" charset="0"/>
+                        <a:cs typeface="Times New Roman" panose="02020603050405020304" pitchFamily="18" charset="0"/>
+                      </a:endParaRPr>
+                    </a:p>
+                  </a:txBody>
+                  <a:tcPr marL="6839" marR="6839" marT="6839" marB="6839" anchor="ctr">
+                    <a:lnL w="12700" cap="flat" cmpd="sng" algn="ctr">
+                      <a:solidFill>
+                        <a:schemeClr val="tx1"/>
+                      </a:solidFill>
+                      <a:prstDash val="solid"/>
+                      <a:round/>
+                      <a:headEnd type="none" w="med" len="med"/>
+                      <a:tailEnd type="none" w="med" len="med"/>
+                    </a:lnL>
+                    <a:lnR w="12700" cap="flat" cmpd="sng" algn="ctr">
+                      <a:solidFill>
+                        <a:schemeClr val="tx1"/>
+                      </a:solidFill>
+                      <a:prstDash val="solid"/>
+                      <a:round/>
+                      <a:headEnd type="none" w="med" len="med"/>
+                      <a:tailEnd type="none" w="med" len="med"/>
+                    </a:lnR>
+                    <a:lnT w="12700" cap="flat" cmpd="sng" algn="ctr">
+                      <a:solidFill>
+                        <a:schemeClr val="tx1"/>
+                      </a:solidFill>
+                      <a:prstDash val="solid"/>
+                      <a:round/>
+                      <a:headEnd type="none" w="med" len="med"/>
+                      <a:tailEnd type="none" w="med" len="med"/>
+                    </a:lnT>
+                    <a:lnB w="12700" cap="flat" cmpd="sng" algn="ctr">
+                      <a:solidFill>
+                        <a:schemeClr val="tx1"/>
+                      </a:solidFill>
+                      <a:prstDash val="solid"/>
+                      <a:round/>
+                      <a:headEnd type="none" w="med" len="med"/>
+                      <a:tailEnd type="none" w="med" len="med"/>
+                    </a:lnB>
+                    <a:solidFill>
+                      <a:srgbClr val="405037"/>
+                    </a:solidFill>
+                  </a:tcPr>
+                </a:tc>
+                <a:extLst>
+                  <a:ext uri="{0D108BD9-81ED-4DB2-BD59-A6C34878D82A}">
+                    <a16:rowId xmlns:a16="http://schemas.microsoft.com/office/drawing/2014/main" val="2575682220"/>
+                  </a:ext>
+                </a:extLst>
+              </a:tr>
+              <a:tr h="488377">
+                <a:tc>
+                  <a:txBody>
+                    <a:bodyPr/>
+                    <a:lstStyle/>
+                    <a:p>
+                      <a:pPr>
+                        <a:lnSpc>
+                          <a:spcPct val="115000"/>
+                        </a:lnSpc>
+                        <a:spcAft>
+                          <a:spcPts val="800"/>
+                        </a:spcAft>
+                      </a:pPr>
+                      <a:r>
+                        <a:rPr lang="en-KE" sz="900" kern="100">
+                          <a:effectLst/>
+                          <a:latin typeface="Century gothic" panose="020B0502020202020204" pitchFamily="34" charset="0"/>
+                        </a:rPr>
+                        <a:t>Week 11-12 (Apr 14 - Apr 27)</a:t>
+                      </a:r>
+                      <a:endParaRPr lang="en-KE" sz="900" kern="100">
+                        <a:effectLst/>
+                        <a:latin typeface="Century gothic" panose="020B0502020202020204" pitchFamily="34" charset="0"/>
+                        <a:ea typeface="Calibri" panose="020F0502020204030204" pitchFamily="34" charset="0"/>
+                        <a:cs typeface="Times New Roman" panose="02020603050405020304" pitchFamily="18" charset="0"/>
+                      </a:endParaRPr>
+                    </a:p>
+                  </a:txBody>
+                  <a:tcPr marL="6839" marR="6839" marT="6839" marB="6839" anchor="ctr">
+                    <a:lnL w="12700" cap="flat" cmpd="sng" algn="ctr">
+                      <a:solidFill>
+                        <a:schemeClr val="tx1"/>
+                      </a:solidFill>
+                      <a:prstDash val="solid"/>
+                      <a:round/>
+                      <a:headEnd type="none" w="med" len="med"/>
+                      <a:tailEnd type="none" w="med" len="med"/>
+                    </a:lnL>
+                    <a:lnR w="12700" cap="flat" cmpd="sng" algn="ctr">
+                      <a:solidFill>
+                        <a:schemeClr val="tx1"/>
+                      </a:solidFill>
+                      <a:prstDash val="solid"/>
+                      <a:round/>
+                      <a:headEnd type="none" w="med" len="med"/>
+                      <a:tailEnd type="none" w="med" len="med"/>
+                    </a:lnR>
+                    <a:lnT w="12700" cap="flat" cmpd="sng" algn="ctr">
+                      <a:solidFill>
+                        <a:schemeClr val="tx1"/>
+                      </a:solidFill>
+                      <a:prstDash val="solid"/>
+                      <a:round/>
+                      <a:headEnd type="none" w="med" len="med"/>
+                      <a:tailEnd type="none" w="med" len="med"/>
+                    </a:lnT>
+                    <a:lnB w="12700" cap="flat" cmpd="sng" algn="ctr">
+                      <a:solidFill>
+                        <a:schemeClr val="tx1"/>
+                      </a:solidFill>
+                      <a:prstDash val="solid"/>
+                      <a:round/>
+                      <a:headEnd type="none" w="med" len="med"/>
+                      <a:tailEnd type="none" w="med" len="med"/>
+                    </a:lnB>
+                    <a:solidFill>
+                      <a:srgbClr val="405037"/>
+                    </a:solidFill>
+                  </a:tcPr>
+                </a:tc>
+                <a:tc>
+                  <a:txBody>
+                    <a:bodyPr/>
+                    <a:lstStyle/>
+                    <a:p>
+                      <a:pPr>
+                        <a:lnSpc>
+                          <a:spcPct val="115000"/>
+                        </a:lnSpc>
+                        <a:spcAft>
+                          <a:spcPts val="800"/>
+                        </a:spcAft>
+                      </a:pPr>
+                      <a:r>
+                        <a:rPr lang="en-KE" sz="900" kern="100">
+                          <a:effectLst/>
+                          <a:latin typeface="Century gothic" panose="020B0502020202020204" pitchFamily="34" charset="0"/>
+                        </a:rPr>
+                        <a:t>Testing &amp; Deployment</a:t>
+                      </a:r>
+                      <a:endParaRPr lang="en-KE" sz="900" kern="100">
+                        <a:effectLst/>
+                        <a:latin typeface="Century gothic" panose="020B0502020202020204" pitchFamily="34" charset="0"/>
+                        <a:ea typeface="Calibri" panose="020F0502020204030204" pitchFamily="34" charset="0"/>
+                        <a:cs typeface="Times New Roman" panose="02020603050405020304" pitchFamily="18" charset="0"/>
+                      </a:endParaRPr>
+                    </a:p>
+                  </a:txBody>
+                  <a:tcPr marL="6839" marR="6839" marT="6839" marB="6839" anchor="ctr">
+                    <a:lnL w="12700" cap="flat" cmpd="sng" algn="ctr">
+                      <a:solidFill>
+                        <a:schemeClr val="tx1"/>
+                      </a:solidFill>
+                      <a:prstDash val="solid"/>
+                      <a:round/>
+                      <a:headEnd type="none" w="med" len="med"/>
+                      <a:tailEnd type="none" w="med" len="med"/>
+                    </a:lnL>
+                    <a:lnR w="12700" cap="flat" cmpd="sng" algn="ctr">
+                      <a:solidFill>
+                        <a:schemeClr val="tx1"/>
+                      </a:solidFill>
+                      <a:prstDash val="solid"/>
+                      <a:round/>
+                      <a:headEnd type="none" w="med" len="med"/>
+                      <a:tailEnd type="none" w="med" len="med"/>
+                    </a:lnR>
+                    <a:lnT w="12700" cap="flat" cmpd="sng" algn="ctr">
+                      <a:solidFill>
+                        <a:schemeClr val="tx1"/>
+                      </a:solidFill>
+                      <a:prstDash val="solid"/>
+                      <a:round/>
+                      <a:headEnd type="none" w="med" len="med"/>
+                      <a:tailEnd type="none" w="med" len="med"/>
+                    </a:lnT>
+                    <a:lnB w="12700" cap="flat" cmpd="sng" algn="ctr">
+                      <a:solidFill>
+                        <a:schemeClr val="tx1"/>
+                      </a:solidFill>
+                      <a:prstDash val="solid"/>
+                      <a:round/>
+                      <a:headEnd type="none" w="med" len="med"/>
+                      <a:tailEnd type="none" w="med" len="med"/>
+                    </a:lnB>
+                    <a:solidFill>
+                      <a:srgbClr val="405037"/>
+                    </a:solidFill>
+                  </a:tcPr>
+                </a:tc>
+                <a:tc>
+                  <a:txBody>
+                    <a:bodyPr/>
+                    <a:lstStyle/>
+                    <a:p>
+                      <a:pPr>
+                        <a:lnSpc>
+                          <a:spcPct val="115000"/>
+                        </a:lnSpc>
+                        <a:spcAft>
+                          <a:spcPts val="800"/>
+                        </a:spcAft>
+                      </a:pPr>
+                      <a:r>
+                        <a:rPr lang="en-KE" sz="900" kern="100" dirty="0">
+                          <a:effectLst/>
+                          <a:latin typeface="Century gothic" panose="020B0502020202020204" pitchFamily="34" charset="0"/>
+                        </a:rPr>
+                        <a:t>- Perform unit and integration testing </a:t>
+                      </a:r>
+                    </a:p>
+                    <a:p>
+                      <a:pPr>
+                        <a:lnSpc>
+                          <a:spcPct val="115000"/>
+                        </a:lnSpc>
+                        <a:spcAft>
+                          <a:spcPts val="800"/>
+                        </a:spcAft>
+                      </a:pPr>
+                      <a:r>
+                        <a:rPr lang="en-KE" sz="900" kern="100" dirty="0">
+                          <a:effectLst/>
+                          <a:latin typeface="Century gothic" panose="020B0502020202020204" pitchFamily="34" charset="0"/>
+                        </a:rPr>
+                        <a:t>– Deploy the minimum viable product (MVP)</a:t>
+                      </a:r>
+                      <a:endParaRPr lang="en-KE" sz="900" kern="100" dirty="0">
+                        <a:effectLst/>
+                        <a:latin typeface="Century gothic" panose="020B0502020202020204" pitchFamily="34" charset="0"/>
+                        <a:ea typeface="Calibri" panose="020F0502020204030204" pitchFamily="34" charset="0"/>
+                        <a:cs typeface="Times New Roman" panose="02020603050405020304" pitchFamily="18" charset="0"/>
+                      </a:endParaRPr>
+                    </a:p>
+                  </a:txBody>
+                  <a:tcPr marL="6839" marR="6839" marT="6839" marB="6839" anchor="ctr">
+                    <a:lnL w="12700" cap="flat" cmpd="sng" algn="ctr">
+                      <a:solidFill>
+                        <a:schemeClr val="tx1"/>
+                      </a:solidFill>
+                      <a:prstDash val="solid"/>
+                      <a:round/>
+                      <a:headEnd type="none" w="med" len="med"/>
+                      <a:tailEnd type="none" w="med" len="med"/>
+                    </a:lnL>
+                    <a:lnR w="12700" cap="flat" cmpd="sng" algn="ctr">
+                      <a:solidFill>
+                        <a:schemeClr val="tx1"/>
+                      </a:solidFill>
+                      <a:prstDash val="solid"/>
+                      <a:round/>
+                      <a:headEnd type="none" w="med" len="med"/>
+                      <a:tailEnd type="none" w="med" len="med"/>
+                    </a:lnR>
+                    <a:lnT w="12700" cap="flat" cmpd="sng" algn="ctr">
+                      <a:solidFill>
+                        <a:schemeClr val="tx1"/>
+                      </a:solidFill>
+                      <a:prstDash val="solid"/>
+                      <a:round/>
+                      <a:headEnd type="none" w="med" len="med"/>
+                      <a:tailEnd type="none" w="med" len="med"/>
+                    </a:lnT>
+                    <a:lnB w="12700" cap="flat" cmpd="sng" algn="ctr">
+                      <a:solidFill>
+                        <a:schemeClr val="tx1"/>
+                      </a:solidFill>
+                      <a:prstDash val="solid"/>
+                      <a:round/>
+                      <a:headEnd type="none" w="med" len="med"/>
+                      <a:tailEnd type="none" w="med" len="med"/>
+                    </a:lnB>
+                    <a:solidFill>
+                      <a:srgbClr val="405037"/>
+                    </a:solidFill>
+                  </a:tcPr>
+                </a:tc>
+                <a:extLst>
+                  <a:ext uri="{0D108BD9-81ED-4DB2-BD59-A6C34878D82A}">
+                    <a16:rowId xmlns:a16="http://schemas.microsoft.com/office/drawing/2014/main" val="3519257656"/>
+                  </a:ext>
+                </a:extLst>
+              </a:tr>
+              <a:tr h="788877">
+                <a:tc>
+                  <a:txBody>
+                    <a:bodyPr/>
+                    <a:lstStyle/>
+                    <a:p>
+                      <a:pPr>
+                        <a:lnSpc>
+                          <a:spcPct val="115000"/>
+                        </a:lnSpc>
+                        <a:spcAft>
+                          <a:spcPts val="800"/>
+                        </a:spcAft>
+                      </a:pPr>
+                      <a:r>
+                        <a:rPr lang="en-KE" sz="900" kern="100">
+                          <a:effectLst/>
+                          <a:latin typeface="Century gothic" panose="020B0502020202020204" pitchFamily="34" charset="0"/>
+                        </a:rPr>
+                        <a:t>Week 13 (Apr 28 - May 2)</a:t>
+                      </a:r>
+                      <a:endParaRPr lang="en-KE" sz="900" kern="100">
+                        <a:effectLst/>
+                        <a:latin typeface="Century gothic" panose="020B0502020202020204" pitchFamily="34" charset="0"/>
+                        <a:ea typeface="Calibri" panose="020F0502020204030204" pitchFamily="34" charset="0"/>
+                        <a:cs typeface="Times New Roman" panose="02020603050405020304" pitchFamily="18" charset="0"/>
+                      </a:endParaRPr>
+                    </a:p>
+                  </a:txBody>
+                  <a:tcPr marL="6839" marR="6839" marT="6839" marB="6839" anchor="ctr">
+                    <a:lnL w="12700" cap="flat" cmpd="sng" algn="ctr">
+                      <a:solidFill>
+                        <a:schemeClr val="tx1"/>
+                      </a:solidFill>
+                      <a:prstDash val="solid"/>
+                      <a:round/>
+                      <a:headEnd type="none" w="med" len="med"/>
+                      <a:tailEnd type="none" w="med" len="med"/>
+                    </a:lnL>
+                    <a:lnR w="12700" cap="flat" cmpd="sng" algn="ctr">
+                      <a:solidFill>
+                        <a:schemeClr val="tx1"/>
+                      </a:solidFill>
+                      <a:prstDash val="solid"/>
+                      <a:round/>
+                      <a:headEnd type="none" w="med" len="med"/>
+                      <a:tailEnd type="none" w="med" len="med"/>
+                    </a:lnR>
+                    <a:lnT w="12700" cap="flat" cmpd="sng" algn="ctr">
+                      <a:solidFill>
+                        <a:schemeClr val="tx1"/>
+                      </a:solidFill>
+                      <a:prstDash val="solid"/>
+                      <a:round/>
+                      <a:headEnd type="none" w="med" len="med"/>
+                      <a:tailEnd type="none" w="med" len="med"/>
+                    </a:lnT>
+                    <a:lnB w="12700" cap="flat" cmpd="sng" algn="ctr">
+                      <a:solidFill>
+                        <a:schemeClr val="tx1"/>
+                      </a:solidFill>
+                      <a:prstDash val="solid"/>
+                      <a:round/>
+                      <a:headEnd type="none" w="med" len="med"/>
+                      <a:tailEnd type="none" w="med" len="med"/>
+                    </a:lnB>
+                    <a:solidFill>
+                      <a:srgbClr val="405037"/>
+                    </a:solidFill>
+                  </a:tcPr>
+                </a:tc>
+                <a:tc>
+                  <a:txBody>
+                    <a:bodyPr/>
+                    <a:lstStyle/>
+                    <a:p>
+                      <a:pPr>
+                        <a:lnSpc>
+                          <a:spcPct val="115000"/>
+                        </a:lnSpc>
+                        <a:spcAft>
+                          <a:spcPts val="800"/>
+                        </a:spcAft>
+                      </a:pPr>
+                      <a:r>
+                        <a:rPr lang="en-KE" sz="900" kern="100">
+                          <a:effectLst/>
+                          <a:latin typeface="Century gothic" panose="020B0502020202020204" pitchFamily="34" charset="0"/>
+                        </a:rPr>
+                        <a:t>Finalization &amp; Submission</a:t>
+                      </a:r>
+                      <a:endParaRPr lang="en-KE" sz="900" kern="100">
+                        <a:effectLst/>
+                        <a:latin typeface="Century gothic" panose="020B0502020202020204" pitchFamily="34" charset="0"/>
+                        <a:ea typeface="Calibri" panose="020F0502020204030204" pitchFamily="34" charset="0"/>
+                        <a:cs typeface="Times New Roman" panose="02020603050405020304" pitchFamily="18" charset="0"/>
+                      </a:endParaRPr>
+                    </a:p>
+                  </a:txBody>
+                  <a:tcPr marL="6839" marR="6839" marT="6839" marB="6839" anchor="ctr">
+                    <a:lnL w="12700" cap="flat" cmpd="sng" algn="ctr">
+                      <a:solidFill>
+                        <a:schemeClr val="tx1"/>
+                      </a:solidFill>
+                      <a:prstDash val="solid"/>
+                      <a:round/>
+                      <a:headEnd type="none" w="med" len="med"/>
+                      <a:tailEnd type="none" w="med" len="med"/>
+                    </a:lnL>
+                    <a:lnR w="12700" cap="flat" cmpd="sng" algn="ctr">
+                      <a:solidFill>
+                        <a:schemeClr val="tx1"/>
+                      </a:solidFill>
+                      <a:prstDash val="solid"/>
+                      <a:round/>
+                      <a:headEnd type="none" w="med" len="med"/>
+                      <a:tailEnd type="none" w="med" len="med"/>
+                    </a:lnR>
+                    <a:lnT w="12700" cap="flat" cmpd="sng" algn="ctr">
+                      <a:solidFill>
+                        <a:schemeClr val="tx1"/>
+                      </a:solidFill>
+                      <a:prstDash val="solid"/>
+                      <a:round/>
+                      <a:headEnd type="none" w="med" len="med"/>
+                      <a:tailEnd type="none" w="med" len="med"/>
+                    </a:lnT>
+                    <a:lnB w="12700" cap="flat" cmpd="sng" algn="ctr">
+                      <a:solidFill>
+                        <a:schemeClr val="tx1"/>
+                      </a:solidFill>
+                      <a:prstDash val="solid"/>
+                      <a:round/>
+                      <a:headEnd type="none" w="med" len="med"/>
+                      <a:tailEnd type="none" w="med" len="med"/>
+                    </a:lnB>
+                    <a:solidFill>
+                      <a:srgbClr val="405037"/>
+                    </a:solidFill>
+                  </a:tcPr>
+                </a:tc>
+                <a:tc>
+                  <a:txBody>
+                    <a:bodyPr/>
+                    <a:lstStyle/>
+                    <a:p>
+                      <a:pPr>
+                        <a:lnSpc>
+                          <a:spcPct val="115000"/>
+                        </a:lnSpc>
+                        <a:spcAft>
+                          <a:spcPts val="800"/>
+                        </a:spcAft>
+                      </a:pPr>
+                      <a:r>
+                        <a:rPr lang="en-KE" sz="900" kern="100" dirty="0">
+                          <a:effectLst/>
+                          <a:latin typeface="Century gothic" panose="020B0502020202020204" pitchFamily="34" charset="0"/>
+                        </a:rPr>
+                        <a:t>- Apply final refinements </a:t>
+                      </a:r>
+                    </a:p>
+                    <a:p>
+                      <a:pPr>
+                        <a:lnSpc>
+                          <a:spcPct val="115000"/>
+                        </a:lnSpc>
+                        <a:spcAft>
+                          <a:spcPts val="800"/>
+                        </a:spcAft>
+                      </a:pPr>
+                      <a:r>
+                        <a:rPr lang="en-KE" sz="900" kern="100" dirty="0">
+                          <a:effectLst/>
+                          <a:latin typeface="Century gothic" panose="020B0502020202020204" pitchFamily="34" charset="0"/>
+                        </a:rPr>
+                        <a:t>- Complete research paper </a:t>
+                      </a:r>
+                    </a:p>
+                    <a:p>
+                      <a:pPr>
+                        <a:lnSpc>
+                          <a:spcPct val="115000"/>
+                        </a:lnSpc>
+                        <a:spcAft>
+                          <a:spcPts val="800"/>
+                        </a:spcAft>
+                      </a:pPr>
+                      <a:r>
+                        <a:rPr lang="en-KE" sz="900" kern="100" dirty="0">
+                          <a:effectLst/>
+                          <a:latin typeface="Century gothic" panose="020B0502020202020204" pitchFamily="34" charset="0"/>
+                        </a:rPr>
+                        <a:t>- Prepare and deliver the final presentation</a:t>
+                      </a:r>
+                      <a:endParaRPr lang="en-KE" sz="900" kern="100" dirty="0">
+                        <a:effectLst/>
+                        <a:latin typeface="Century gothic" panose="020B0502020202020204" pitchFamily="34" charset="0"/>
+                        <a:ea typeface="Calibri" panose="020F0502020204030204" pitchFamily="34" charset="0"/>
+                        <a:cs typeface="Times New Roman" panose="02020603050405020304" pitchFamily="18" charset="0"/>
+                      </a:endParaRPr>
+                    </a:p>
+                  </a:txBody>
+                  <a:tcPr marL="6839" marR="6839" marT="6839" marB="6839" anchor="ctr">
+                    <a:lnL w="12700" cap="flat" cmpd="sng" algn="ctr">
+                      <a:solidFill>
+                        <a:schemeClr val="tx1"/>
+                      </a:solidFill>
+                      <a:prstDash val="solid"/>
+                      <a:round/>
+                      <a:headEnd type="none" w="med" len="med"/>
+                      <a:tailEnd type="none" w="med" len="med"/>
+                    </a:lnL>
+                    <a:lnR w="12700" cap="flat" cmpd="sng" algn="ctr">
+                      <a:solidFill>
+                        <a:schemeClr val="tx1"/>
+                      </a:solidFill>
+                      <a:prstDash val="solid"/>
+                      <a:round/>
+                      <a:headEnd type="none" w="med" len="med"/>
+                      <a:tailEnd type="none" w="med" len="med"/>
+                    </a:lnR>
+                    <a:lnT w="12700" cap="flat" cmpd="sng" algn="ctr">
+                      <a:solidFill>
+                        <a:schemeClr val="tx1"/>
+                      </a:solidFill>
+                      <a:prstDash val="solid"/>
+                      <a:round/>
+                      <a:headEnd type="none" w="med" len="med"/>
+                      <a:tailEnd type="none" w="med" len="med"/>
+                    </a:lnT>
+                    <a:lnB w="12700" cap="flat" cmpd="sng" algn="ctr">
+                      <a:solidFill>
+                        <a:schemeClr val="tx1"/>
+                      </a:solidFill>
+                      <a:prstDash val="solid"/>
+                      <a:round/>
+                      <a:headEnd type="none" w="med" len="med"/>
+                      <a:tailEnd type="none" w="med" len="med"/>
+                    </a:lnB>
+                    <a:solidFill>
+                      <a:srgbClr val="405037"/>
+                    </a:solidFill>
+                  </a:tcPr>
+                </a:tc>
+                <a:extLst>
+                  <a:ext uri="{0D108BD9-81ED-4DB2-BD59-A6C34878D82A}">
+                    <a16:rowId xmlns:a16="http://schemas.microsoft.com/office/drawing/2014/main" val="3163239826"/>
+                  </a:ext>
+                </a:extLst>
+              </a:tr>
+            </a:tbl>
+          </a:graphicData>
+        </a:graphic>
+      </p:graphicFrame>
+      <p:sp>
+        <p:nvSpPr>
+          <p:cNvPr id="42" name="TextBox 41">
+            <a:extLst>
+              <a:ext uri="{FF2B5EF4-FFF2-40B4-BE49-F238E27FC236}">
+                <a16:creationId xmlns:a16="http://schemas.microsoft.com/office/drawing/2014/main" id="{C847B87F-6D0A-73F1-1B1C-278835231A6F}"/>
+              </a:ext>
+            </a:extLst>
+          </p:cNvPr>
+          <p:cNvSpPr txBox="1"/>
+          <p:nvPr/>
+        </p:nvSpPr>
+        <p:spPr>
+          <a:xfrm>
+            <a:off x="2167703" y="134283"/>
+            <a:ext cx="2231648" cy="369332"/>
           </a:xfrm>
           <a:prstGeom prst="rect">
             <a:avLst/>
           </a:prstGeom>
           <a:noFill/>
-          <a:ln/>
         </p:spPr>
         <p:txBody>
-          <a:bodyPr wrap="square" lIns="0" tIns="0" rIns="0" bIns="0" rtlCol="0" anchor="t"/>
+          <a:bodyPr wrap="square" rtlCol="0">
+            <a:spAutoFit/>
+          </a:bodyPr>
           <a:lstStyle/>
           <a:p>
-            <a:pPr algn="ctr">
-              <a:lnSpc>
-                <a:spcPts val="1680"/>
-              </a:lnSpc>
-            </a:pPr>
             <a:r>
-              <a:rPr lang="en-US" sz="1100" b="0" dirty="0">
-                <a:solidFill>
-                  <a:srgbClr val="446547"/>
-                </a:solidFill>
-                <a:latin typeface="DM Sans" pitchFamily="34" charset="0"/>
-                <a:ea typeface="DM Sans" pitchFamily="34" charset="-122"/>
-                <a:cs typeface="DM Sans" pitchFamily="34" charset="-120"/>
+              <a:rPr lang="en-US" dirty="0">
+                <a:latin typeface="Century gothic" panose="020F0502020204030204" pitchFamily="34" charset="0"/>
               </a:rPr>
-              <a:t>Problem Identification</a:t>
+              <a:t>PROJECT TIMELINE</a:t>
             </a:r>
-            <a:endParaRPr lang="en-US" sz="1050" dirty="0"/>
-          </a:p>
-        </p:txBody>
-      </p:sp>
-      <p:sp>
-        <p:nvSpPr>
-          <p:cNvPr id="16" name="Shape 13"/>
-          <p:cNvSpPr/>
-          <p:nvPr/>
-        </p:nvSpPr>
-        <p:spPr>
-          <a:xfrm rot="5400000">
-            <a:off x="1458868" y="3099745"/>
-            <a:ext cx="281548" cy="0"/>
-          </a:xfrm>
-          <a:prstGeom prst="line">
-            <a:avLst/>
-          </a:prstGeom>
-          <a:solidFill>
-            <a:srgbClr val="F8FCF4"/>
-          </a:solidFill>
-          <a:ln w="10583">
-            <a:solidFill>
-              <a:srgbClr val="6F8A5E"/>
-            </a:solidFill>
-            <a:prstDash val="solid"/>
-            <a:headEnd type="none"/>
-            <a:tailEnd type="none"/>
-          </a:ln>
-        </p:spPr>
-      </p:sp>
-      <p:sp>
-        <p:nvSpPr>
-          <p:cNvPr id="17" name="Text 14"/>
-          <p:cNvSpPr/>
-          <p:nvPr/>
-        </p:nvSpPr>
-        <p:spPr>
-          <a:xfrm>
-            <a:off x="1517202" y="2810306"/>
-            <a:ext cx="171046" cy="171046"/>
-          </a:xfrm>
-          <a:prstGeom prst="diamond">
-            <a:avLst/>
-          </a:prstGeom>
-          <a:solidFill>
-            <a:srgbClr val="F8FCF4"/>
-          </a:solidFill>
-          <a:ln w="10583">
-            <a:solidFill>
-              <a:srgbClr val="6F8A5E"/>
-            </a:solidFill>
-          </a:ln>
-        </p:spPr>
-        <p:txBody>
-          <a:bodyPr wrap="square" lIns="9503" tIns="20193" rIns="9503" bIns="20193" rtlCol="0" anchor="ctr"/>
-          <a:lstStyle/>
-          <a:p>
-            <a:pPr algn="ctr">
-              <a:lnSpc>
-                <a:spcPts val="1969"/>
-              </a:lnSpc>
-            </a:pPr>
-            <a:endParaRPr lang="en-US" sz="1575" dirty="0"/>
-          </a:p>
-        </p:txBody>
-      </p:sp>
-      <p:sp>
-        <p:nvSpPr>
-          <p:cNvPr id="18" name="Text 15"/>
-          <p:cNvSpPr/>
-          <p:nvPr/>
-        </p:nvSpPr>
-        <p:spPr>
-          <a:xfrm>
-            <a:off x="2601607" y="3935660"/>
-            <a:ext cx="1219498" cy="213321"/>
-          </a:xfrm>
-          <a:prstGeom prst="rect">
-            <a:avLst/>
-          </a:prstGeom>
-          <a:noFill/>
-          <a:ln/>
-        </p:spPr>
-        <p:txBody>
-          <a:bodyPr wrap="square" lIns="0" tIns="0" rIns="0" bIns="0" rtlCol="0" anchor="t"/>
-          <a:lstStyle/>
-          <a:p>
-            <a:pPr algn="ctr">
-              <a:lnSpc>
-                <a:spcPts val="1680"/>
-              </a:lnSpc>
-            </a:pPr>
-            <a:r>
-              <a:rPr lang="en-US" sz="1100" b="0" dirty="0">
-                <a:solidFill>
-                  <a:srgbClr val="446547"/>
-                </a:solidFill>
-                <a:latin typeface="DM Sans" pitchFamily="34" charset="0"/>
-                <a:ea typeface="DM Sans" pitchFamily="34" charset="-122"/>
-                <a:cs typeface="DM Sans" pitchFamily="34" charset="-120"/>
-              </a:rPr>
-              <a:t>Design</a:t>
-            </a:r>
-            <a:endParaRPr lang="en-US" sz="1050" dirty="0"/>
-          </a:p>
-        </p:txBody>
-      </p:sp>
-      <p:sp>
-        <p:nvSpPr>
-          <p:cNvPr id="19" name="Text 16"/>
-          <p:cNvSpPr/>
-          <p:nvPr/>
-        </p:nvSpPr>
-        <p:spPr>
-          <a:xfrm>
-            <a:off x="3121750" y="2810306"/>
-            <a:ext cx="171046" cy="171046"/>
-          </a:xfrm>
-          <a:prstGeom prst="diamond">
-            <a:avLst/>
-          </a:prstGeom>
-          <a:solidFill>
-            <a:srgbClr val="F8FCF4"/>
-          </a:solidFill>
-          <a:ln w="10583">
-            <a:solidFill>
-              <a:srgbClr val="6F8A5E"/>
-            </a:solidFill>
-          </a:ln>
-        </p:spPr>
-        <p:txBody>
-          <a:bodyPr wrap="square" lIns="9503" tIns="20193" rIns="9503" bIns="20193" rtlCol="0" anchor="ctr"/>
-          <a:lstStyle/>
-          <a:p>
-            <a:pPr algn="ctr">
-              <a:lnSpc>
-                <a:spcPts val="1969"/>
-              </a:lnSpc>
-            </a:pPr>
-            <a:endParaRPr lang="en-US" sz="1575" dirty="0"/>
-          </a:p>
-        </p:txBody>
-      </p:sp>
-      <p:sp>
-        <p:nvSpPr>
-          <p:cNvPr id="20" name="Shape 17"/>
-          <p:cNvSpPr/>
-          <p:nvPr/>
-        </p:nvSpPr>
-        <p:spPr>
-          <a:xfrm rot="5400000">
-            <a:off x="2748466" y="3441565"/>
-            <a:ext cx="920973" cy="0"/>
-          </a:xfrm>
-          <a:prstGeom prst="line">
-            <a:avLst/>
-          </a:prstGeom>
-          <a:solidFill>
-            <a:srgbClr val="F8FCF4"/>
-          </a:solidFill>
-          <a:ln w="10583">
-            <a:solidFill>
-              <a:srgbClr val="6F8A5E"/>
-            </a:solidFill>
-            <a:prstDash val="solid"/>
-            <a:headEnd type="none"/>
-            <a:tailEnd type="none"/>
-          </a:ln>
-        </p:spPr>
-      </p:sp>
-      <p:sp>
-        <p:nvSpPr>
-          <p:cNvPr id="21" name="Text 18"/>
-          <p:cNvSpPr/>
-          <p:nvPr/>
-        </p:nvSpPr>
-        <p:spPr>
-          <a:xfrm>
-            <a:off x="4031493" y="3330193"/>
-            <a:ext cx="1084511" cy="213321"/>
-          </a:xfrm>
-          <a:prstGeom prst="rect">
-            <a:avLst/>
-          </a:prstGeom>
-          <a:noFill/>
-          <a:ln/>
-        </p:spPr>
-        <p:txBody>
-          <a:bodyPr wrap="square" lIns="0" tIns="0" rIns="0" bIns="0" rtlCol="0" anchor="t"/>
-          <a:lstStyle/>
-          <a:p>
-            <a:pPr algn="ctr">
-              <a:lnSpc>
-                <a:spcPts val="1680"/>
-              </a:lnSpc>
-            </a:pPr>
-            <a:r>
-              <a:rPr lang="en-US" sz="1100" b="0" dirty="0">
-                <a:solidFill>
-                  <a:srgbClr val="446547"/>
-                </a:solidFill>
-                <a:latin typeface="DM Sans" pitchFamily="34" charset="0"/>
-                <a:ea typeface="DM Sans" pitchFamily="34" charset="-122"/>
-                <a:cs typeface="DM Sans" pitchFamily="34" charset="-120"/>
-              </a:rPr>
-              <a:t>Development</a:t>
-            </a:r>
-            <a:endParaRPr lang="en-US" sz="1050" dirty="0"/>
-          </a:p>
-        </p:txBody>
-      </p:sp>
-      <p:sp>
-        <p:nvSpPr>
-          <p:cNvPr id="22" name="Text 19"/>
-          <p:cNvSpPr/>
-          <p:nvPr/>
-        </p:nvSpPr>
-        <p:spPr>
-          <a:xfrm>
-            <a:off x="4403344" y="2810306"/>
-            <a:ext cx="171046" cy="171046"/>
-          </a:xfrm>
-          <a:prstGeom prst="diamond">
-            <a:avLst/>
-          </a:prstGeom>
-          <a:solidFill>
-            <a:srgbClr val="F8FCF4"/>
-          </a:solidFill>
-          <a:ln w="10583">
-            <a:solidFill>
-              <a:srgbClr val="6F8A5E"/>
-            </a:solidFill>
-          </a:ln>
-        </p:spPr>
-        <p:txBody>
-          <a:bodyPr wrap="square" lIns="9503" tIns="20193" rIns="9503" bIns="20193" rtlCol="0" anchor="ctr"/>
-          <a:lstStyle/>
-          <a:p>
-            <a:pPr algn="ctr">
-              <a:lnSpc>
-                <a:spcPts val="1969"/>
-              </a:lnSpc>
-            </a:pPr>
-            <a:endParaRPr lang="en-US" sz="1575" dirty="0"/>
-          </a:p>
-        </p:txBody>
-      </p:sp>
-      <p:sp>
-        <p:nvSpPr>
-          <p:cNvPr id="23" name="Shape 20"/>
-          <p:cNvSpPr/>
-          <p:nvPr/>
-        </p:nvSpPr>
-        <p:spPr>
-          <a:xfrm rot="5400000">
-            <a:off x="4349772" y="3123922"/>
-            <a:ext cx="281548" cy="0"/>
-          </a:xfrm>
-          <a:prstGeom prst="line">
-            <a:avLst/>
-          </a:prstGeom>
-          <a:solidFill>
-            <a:srgbClr val="F8FCF4"/>
-          </a:solidFill>
-          <a:ln w="10583">
-            <a:solidFill>
-              <a:srgbClr val="6F8A5E"/>
-            </a:solidFill>
-            <a:prstDash val="solid"/>
-            <a:headEnd type="none"/>
-            <a:tailEnd type="none"/>
-          </a:ln>
-        </p:spPr>
-      </p:sp>
-      <p:sp>
-        <p:nvSpPr>
-          <p:cNvPr id="24" name="Text 21"/>
-          <p:cNvSpPr/>
-          <p:nvPr/>
-        </p:nvSpPr>
-        <p:spPr>
-          <a:xfrm>
-            <a:off x="6175821" y="3931989"/>
-            <a:ext cx="1069430" cy="213321"/>
-          </a:xfrm>
-          <a:prstGeom prst="rect">
-            <a:avLst/>
-          </a:prstGeom>
-          <a:noFill/>
-          <a:ln/>
-        </p:spPr>
-        <p:txBody>
-          <a:bodyPr wrap="square" lIns="0" tIns="0" rIns="0" bIns="0" rtlCol="0" anchor="t"/>
-          <a:lstStyle/>
-          <a:p>
-            <a:pPr algn="ctr">
-              <a:lnSpc>
-                <a:spcPts val="1680"/>
-              </a:lnSpc>
-            </a:pPr>
-            <a:r>
-              <a:rPr lang="en-US" sz="1100" b="0" dirty="0">
-                <a:solidFill>
-                  <a:srgbClr val="446547"/>
-                </a:solidFill>
-                <a:latin typeface="DM Sans" pitchFamily="34" charset="0"/>
-                <a:ea typeface="DM Sans" pitchFamily="34" charset="-122"/>
-                <a:cs typeface="DM Sans" pitchFamily="34" charset="-120"/>
-              </a:rPr>
-              <a:t>Testing</a:t>
-            </a:r>
-            <a:endParaRPr lang="en-US" sz="1050" dirty="0"/>
-          </a:p>
-        </p:txBody>
-      </p:sp>
-      <p:sp>
-        <p:nvSpPr>
-          <p:cNvPr id="25" name="Text 22"/>
-          <p:cNvSpPr/>
-          <p:nvPr/>
-        </p:nvSpPr>
-        <p:spPr>
-          <a:xfrm>
-            <a:off x="6624145" y="2810306"/>
-            <a:ext cx="171046" cy="171046"/>
-          </a:xfrm>
-          <a:prstGeom prst="diamond">
-            <a:avLst/>
-          </a:prstGeom>
-          <a:solidFill>
-            <a:srgbClr val="F8FCF4"/>
-          </a:solidFill>
-          <a:ln w="10583">
-            <a:solidFill>
-              <a:srgbClr val="6F8A5E"/>
-            </a:solidFill>
-          </a:ln>
-        </p:spPr>
-        <p:txBody>
-          <a:bodyPr wrap="square" lIns="9503" tIns="20193" rIns="9503" bIns="20193" rtlCol="0" anchor="ctr"/>
-          <a:lstStyle/>
-          <a:p>
-            <a:pPr algn="ctr">
-              <a:lnSpc>
-                <a:spcPts val="1969"/>
-              </a:lnSpc>
-            </a:pPr>
-            <a:endParaRPr lang="en-US" sz="1575" dirty="0"/>
-          </a:p>
-        </p:txBody>
-      </p:sp>
-      <p:sp>
-        <p:nvSpPr>
-          <p:cNvPr id="26" name="Shape 23"/>
-          <p:cNvSpPr/>
-          <p:nvPr/>
-        </p:nvSpPr>
-        <p:spPr>
-          <a:xfrm rot="5400000">
-            <a:off x="6250861" y="3460864"/>
-            <a:ext cx="920973" cy="0"/>
-          </a:xfrm>
-          <a:prstGeom prst="line">
-            <a:avLst/>
-          </a:prstGeom>
-          <a:solidFill>
-            <a:srgbClr val="F8FCF4"/>
-          </a:solidFill>
-          <a:ln w="10583">
-            <a:solidFill>
-              <a:srgbClr val="6F8A5E"/>
-            </a:solidFill>
-            <a:prstDash val="solid"/>
-            <a:headEnd type="none"/>
-            <a:tailEnd type="none"/>
-          </a:ln>
-        </p:spPr>
-      </p:sp>
-      <p:sp>
-        <p:nvSpPr>
-          <p:cNvPr id="27" name="Text 24"/>
-          <p:cNvSpPr/>
-          <p:nvPr/>
-        </p:nvSpPr>
-        <p:spPr>
-          <a:xfrm>
-            <a:off x="475338" y="476250"/>
-            <a:ext cx="8191351" cy="457200"/>
-          </a:xfrm>
-          <a:prstGeom prst="rect">
-            <a:avLst/>
-          </a:prstGeom>
-          <a:noFill/>
-          <a:ln/>
-        </p:spPr>
-        <p:txBody>
-          <a:bodyPr wrap="square" lIns="0" tIns="0" rIns="0" bIns="0" rtlCol="0" anchor="t"/>
-          <a:lstStyle/>
-          <a:p>
-            <a:pPr algn="ctr">
-              <a:lnSpc>
-                <a:spcPts val="3600"/>
-              </a:lnSpc>
-            </a:pPr>
-            <a:r>
-              <a:rPr lang="en-US" sz="3000" b="0" dirty="0">
-                <a:solidFill>
-                  <a:srgbClr val="1A1E1A"/>
-                </a:solidFill>
-                <a:latin typeface="Fraunces" pitchFamily="34" charset="0"/>
-                <a:ea typeface="Fraunces" pitchFamily="34" charset="-122"/>
-                <a:cs typeface="Fraunces" pitchFamily="34" charset="-120"/>
-              </a:rPr>
-              <a:t>Roadmap</a:t>
-            </a:r>
-            <a:endParaRPr lang="en-US" sz="3000" dirty="0"/>
-          </a:p>
-        </p:txBody>
-      </p:sp>
-      <p:sp>
-        <p:nvSpPr>
-          <p:cNvPr id="28" name="Shape 25"/>
-          <p:cNvSpPr/>
-          <p:nvPr/>
-        </p:nvSpPr>
-        <p:spPr>
-          <a:xfrm>
-            <a:off x="-23812" y="0"/>
-            <a:ext cx="119063" cy="5143500"/>
-          </a:xfrm>
-          <a:prstGeom prst="roundRect">
-            <a:avLst>
-              <a:gd name="adj" fmla="val -767997"/>
-            </a:avLst>
-          </a:prstGeom>
-          <a:solidFill>
-            <a:srgbClr val="F8FCF4"/>
-          </a:solidFill>
-          <a:ln/>
-        </p:spPr>
-      </p:sp>
-      <p:sp>
-        <p:nvSpPr>
-          <p:cNvPr id="29" name="Shape 26"/>
-          <p:cNvSpPr/>
-          <p:nvPr/>
-        </p:nvSpPr>
-        <p:spPr>
-          <a:xfrm>
-            <a:off x="9048788" y="0"/>
-            <a:ext cx="119063" cy="5143500"/>
-          </a:xfrm>
-          <a:prstGeom prst="roundRect">
-            <a:avLst>
-              <a:gd name="adj" fmla="val -767997"/>
-            </a:avLst>
-          </a:prstGeom>
-          <a:solidFill>
-            <a:srgbClr val="F8FCF4"/>
-          </a:solidFill>
-          <a:ln/>
-        </p:spPr>
-      </p:sp>
-      <p:sp>
-        <p:nvSpPr>
-          <p:cNvPr id="30" name="Shape 27"/>
-          <p:cNvSpPr/>
-          <p:nvPr/>
-        </p:nvSpPr>
-        <p:spPr>
-          <a:xfrm>
-            <a:off x="356" y="-23812"/>
-            <a:ext cx="9143398" cy="119063"/>
-          </a:xfrm>
-          <a:prstGeom prst="roundRect">
-            <a:avLst>
-              <a:gd name="adj" fmla="val -767997"/>
-            </a:avLst>
-          </a:prstGeom>
-          <a:solidFill>
-            <a:srgbClr val="F8FCF4"/>
-          </a:solidFill>
-          <a:ln/>
-        </p:spPr>
-      </p:sp>
-      <p:sp>
-        <p:nvSpPr>
-          <p:cNvPr id="31" name="Shape 28"/>
-          <p:cNvSpPr/>
-          <p:nvPr/>
-        </p:nvSpPr>
-        <p:spPr>
-          <a:xfrm>
-            <a:off x="356" y="5053064"/>
-            <a:ext cx="9143398" cy="119062"/>
-          </a:xfrm>
-          <a:prstGeom prst="roundRect">
-            <a:avLst>
-              <a:gd name="adj" fmla="val -768003"/>
-            </a:avLst>
-          </a:prstGeom>
-          <a:solidFill>
-            <a:srgbClr val="F8FCF4"/>
-          </a:solidFill>
-          <a:ln/>
-        </p:spPr>
-      </p:sp>
-      <p:sp>
-        <p:nvSpPr>
-          <p:cNvPr id="32" name="Text 29"/>
-          <p:cNvSpPr/>
-          <p:nvPr/>
-        </p:nvSpPr>
-        <p:spPr>
-          <a:xfrm>
-            <a:off x="522482" y="2584517"/>
-            <a:ext cx="610344" cy="182835"/>
-          </a:xfrm>
-          <a:prstGeom prst="rect">
-            <a:avLst/>
-          </a:prstGeom>
-          <a:noFill/>
-          <a:ln/>
-        </p:spPr>
-        <p:txBody>
-          <a:bodyPr wrap="square" lIns="0" tIns="0" rIns="0" bIns="0" rtlCol="0" anchor="t"/>
-          <a:lstStyle/>
-          <a:p>
-            <a:pPr algn="ctr">
-              <a:lnSpc>
-                <a:spcPts val="1440"/>
-              </a:lnSpc>
-            </a:pPr>
-            <a:r>
-              <a:rPr lang="en-US" sz="900" b="0" dirty="0">
-                <a:solidFill>
-                  <a:srgbClr val="446547"/>
-                </a:solidFill>
-                <a:latin typeface="DM Sans" pitchFamily="34" charset="0"/>
-                <a:ea typeface="DM Sans" pitchFamily="34" charset="-122"/>
-                <a:cs typeface="DM Sans" pitchFamily="34" charset="-120"/>
-              </a:rPr>
-              <a:t>Jan</a:t>
-            </a:r>
-            <a:endParaRPr lang="en-US" sz="900" dirty="0"/>
-          </a:p>
-        </p:txBody>
-      </p:sp>
-      <p:sp>
-        <p:nvSpPr>
-          <p:cNvPr id="33" name="Text 30"/>
-          <p:cNvSpPr/>
-          <p:nvPr/>
-        </p:nvSpPr>
-        <p:spPr>
-          <a:xfrm>
-            <a:off x="2571848" y="2581252"/>
-            <a:ext cx="610295" cy="182860"/>
-          </a:xfrm>
-          <a:prstGeom prst="rect">
-            <a:avLst/>
-          </a:prstGeom>
-          <a:noFill/>
-          <a:ln/>
-        </p:spPr>
-        <p:txBody>
-          <a:bodyPr wrap="square" lIns="0" tIns="0" rIns="0" bIns="0" rtlCol="0" anchor="t"/>
-          <a:lstStyle/>
-          <a:p>
-            <a:pPr algn="ctr">
-              <a:lnSpc>
-                <a:spcPts val="1440"/>
-              </a:lnSpc>
-            </a:pPr>
-            <a:r>
-              <a:rPr lang="en-US" sz="900" b="0" dirty="0">
-                <a:solidFill>
-                  <a:srgbClr val="446547"/>
-                </a:solidFill>
-                <a:latin typeface="DM Sans" pitchFamily="34" charset="0"/>
-                <a:ea typeface="DM Sans" pitchFamily="34" charset="-122"/>
-                <a:cs typeface="DM Sans" pitchFamily="34" charset="-120"/>
-              </a:rPr>
-              <a:t>Feb</a:t>
-            </a:r>
-            <a:endParaRPr lang="en-US" sz="900" dirty="0"/>
-          </a:p>
-        </p:txBody>
-      </p:sp>
-      <p:sp>
-        <p:nvSpPr>
-          <p:cNvPr id="34" name="Text 31"/>
-          <p:cNvSpPr/>
-          <p:nvPr/>
-        </p:nvSpPr>
-        <p:spPr>
-          <a:xfrm>
-            <a:off x="4609931" y="2581252"/>
-            <a:ext cx="609848" cy="182860"/>
-          </a:xfrm>
-          <a:prstGeom prst="rect">
-            <a:avLst/>
-          </a:prstGeom>
-          <a:noFill/>
-          <a:ln/>
-        </p:spPr>
-        <p:txBody>
-          <a:bodyPr wrap="square" lIns="0" tIns="0" rIns="0" bIns="0" rtlCol="0" anchor="t"/>
-          <a:lstStyle/>
-          <a:p>
-            <a:pPr algn="ctr">
-              <a:lnSpc>
-                <a:spcPts val="1440"/>
-              </a:lnSpc>
-            </a:pPr>
-            <a:r>
-              <a:rPr lang="en-US" sz="900" b="0" dirty="0">
-                <a:solidFill>
-                  <a:srgbClr val="446547"/>
-                </a:solidFill>
-                <a:latin typeface="DM Sans" pitchFamily="34" charset="0"/>
-                <a:ea typeface="DM Sans" pitchFamily="34" charset="-122"/>
-                <a:cs typeface="DM Sans" pitchFamily="34" charset="-120"/>
-              </a:rPr>
-              <a:t>Mar</a:t>
-            </a:r>
-            <a:endParaRPr lang="en-US" sz="900" dirty="0"/>
-          </a:p>
-        </p:txBody>
-      </p:sp>
-      <p:sp>
-        <p:nvSpPr>
-          <p:cNvPr id="35" name="Text 32"/>
-          <p:cNvSpPr/>
-          <p:nvPr/>
-        </p:nvSpPr>
-        <p:spPr>
-          <a:xfrm>
-            <a:off x="6664888" y="2581253"/>
-            <a:ext cx="610096" cy="182860"/>
-          </a:xfrm>
-          <a:prstGeom prst="rect">
-            <a:avLst/>
-          </a:prstGeom>
-          <a:noFill/>
-          <a:ln/>
-        </p:spPr>
-        <p:txBody>
-          <a:bodyPr wrap="square" lIns="0" tIns="0" rIns="0" bIns="0" rtlCol="0" anchor="t"/>
-          <a:lstStyle/>
-          <a:p>
-            <a:pPr algn="ctr">
-              <a:lnSpc>
-                <a:spcPts val="1440"/>
-              </a:lnSpc>
-            </a:pPr>
-            <a:r>
-              <a:rPr lang="en-US" sz="900" b="0" dirty="0">
-                <a:solidFill>
-                  <a:srgbClr val="446547"/>
-                </a:solidFill>
-                <a:latin typeface="DM Sans" pitchFamily="34" charset="0"/>
-                <a:ea typeface="DM Sans" pitchFamily="34" charset="-122"/>
-                <a:cs typeface="DM Sans" pitchFamily="34" charset="-120"/>
-              </a:rPr>
-              <a:t>Apr</a:t>
-            </a:r>
-            <a:endParaRPr lang="en-US" sz="900" dirty="0"/>
-          </a:p>
-        </p:txBody>
-      </p:sp>
-      <p:sp>
-        <p:nvSpPr>
-          <p:cNvPr id="36" name="Text 33"/>
-          <p:cNvSpPr/>
-          <p:nvPr/>
-        </p:nvSpPr>
-        <p:spPr>
-          <a:xfrm>
-            <a:off x="7823243" y="2814635"/>
-            <a:ext cx="171046" cy="171046"/>
-          </a:xfrm>
-          <a:prstGeom prst="diamond">
-            <a:avLst/>
-          </a:prstGeom>
-          <a:solidFill>
-            <a:srgbClr val="F8FCF4"/>
-          </a:solidFill>
-          <a:ln w="10583">
-            <a:solidFill>
-              <a:srgbClr val="6F8A5E"/>
-            </a:solidFill>
-          </a:ln>
-        </p:spPr>
-        <p:txBody>
-          <a:bodyPr wrap="square" lIns="9503" tIns="20193" rIns="9503" bIns="20193" rtlCol="0" anchor="ctr"/>
-          <a:lstStyle/>
-          <a:p>
-            <a:pPr algn="ctr">
-              <a:lnSpc>
-                <a:spcPts val="1969"/>
-              </a:lnSpc>
-            </a:pPr>
-            <a:endParaRPr lang="en-US" sz="1575" dirty="0"/>
-          </a:p>
-        </p:txBody>
-      </p:sp>
-      <p:sp>
-        <p:nvSpPr>
-          <p:cNvPr id="37" name="Shape 34"/>
-          <p:cNvSpPr/>
-          <p:nvPr/>
-        </p:nvSpPr>
-        <p:spPr>
-          <a:xfrm rot="5400000">
-            <a:off x="7765390" y="3138879"/>
-            <a:ext cx="281548" cy="0"/>
-          </a:xfrm>
-          <a:prstGeom prst="line">
-            <a:avLst/>
-          </a:prstGeom>
-          <a:solidFill>
-            <a:srgbClr val="F8FCF4"/>
-          </a:solidFill>
-          <a:ln w="10583">
-            <a:solidFill>
-              <a:srgbClr val="6F8A5E"/>
-            </a:solidFill>
-            <a:prstDash val="solid"/>
-            <a:headEnd type="none"/>
-            <a:tailEnd type="none"/>
-          </a:ln>
-        </p:spPr>
-      </p:sp>
-      <p:sp>
-        <p:nvSpPr>
-          <p:cNvPr id="38" name="Text 35"/>
-          <p:cNvSpPr/>
-          <p:nvPr/>
-        </p:nvSpPr>
-        <p:spPr>
-          <a:xfrm>
-            <a:off x="7376704" y="3282817"/>
-            <a:ext cx="1069380" cy="213320"/>
-          </a:xfrm>
-          <a:prstGeom prst="rect">
-            <a:avLst/>
-          </a:prstGeom>
-          <a:noFill/>
-          <a:ln/>
-        </p:spPr>
-        <p:txBody>
-          <a:bodyPr wrap="square" lIns="0" tIns="0" rIns="0" bIns="0" rtlCol="0" anchor="t"/>
-          <a:lstStyle/>
-          <a:p>
-            <a:pPr algn="ctr">
-              <a:lnSpc>
-                <a:spcPts val="1680"/>
-              </a:lnSpc>
-            </a:pPr>
-            <a:r>
-              <a:rPr lang="en-US" sz="1100" b="0" dirty="0">
-                <a:solidFill>
-                  <a:srgbClr val="446547"/>
-                </a:solidFill>
-                <a:latin typeface="DM Sans" pitchFamily="34" charset="0"/>
-                <a:ea typeface="DM Sans" pitchFamily="34" charset="-122"/>
-                <a:cs typeface="DM Sans" pitchFamily="34" charset="-120"/>
-              </a:rPr>
-              <a:t>Deployment</a:t>
-            </a:r>
-            <a:endParaRPr lang="en-US" sz="1050" dirty="0"/>
+            <a:endParaRPr lang="en-KE" dirty="0">
+              <a:latin typeface="Century gothic" panose="020F0502020204030204" pitchFamily="34" charset="0"/>
+            </a:endParaRPr>
           </a:p>
         </p:txBody>
       </p:sp>
